--- a/CST simulation/Wilkinson Power Divider Simulation.pptx
+++ b/CST simulation/Wilkinson Power Divider Simulation.pptx
@@ -10,6 +10,16 @@
     <p:sldId id="258" r:id="rId4"/>
     <p:sldId id="259" r:id="rId5"/>
     <p:sldId id="260" r:id="rId6"/>
+    <p:sldId id="263" r:id="rId7"/>
+    <p:sldId id="261" r:id="rId8"/>
+    <p:sldId id="262" r:id="rId9"/>
+    <p:sldId id="264" r:id="rId10"/>
+    <p:sldId id="265" r:id="rId11"/>
+    <p:sldId id="266" r:id="rId12"/>
+    <p:sldId id="267" r:id="rId13"/>
+    <p:sldId id="268" r:id="rId14"/>
+    <p:sldId id="269" r:id="rId15"/>
+    <p:sldId id="270" r:id="rId16"/>
   </p:sldIdLst>
   <p:sldSz cx="12192000" cy="6858000"/>
   <p:notesSz cx="6858000" cy="9144000"/>
@@ -108,6 +118,11 @@
       </a:defRPr>
     </a:lvl9pPr>
   </p:defaultTextStyle>
+  <p:extLst>
+    <p:ext uri="{EFAFB233-063F-42B5-8137-9DF3F51BA10A}">
+      <p15:sldGuideLst xmlns:p15="http://schemas.microsoft.com/office/powerpoint/2012/main"/>
+    </p:ext>
+  </p:extLst>
 </p:presentation>
 </file>
 
@@ -258,7 +273,7 @@
           <a:p>
             <a:fld id="{DBB1ACE0-7167-418E-A7EF-EFF9F52AAEFB}" type="datetimeFigureOut">
               <a:rPr lang="en-US" smtClean="0"/>
-              <a:t>10/5/2025</a:t>
+              <a:t>8/30/2026</a:t>
             </a:fld>
             <a:endParaRPr lang="en-US"/>
           </a:p>
@@ -456,7 +471,7 @@
           <a:p>
             <a:fld id="{DBB1ACE0-7167-418E-A7EF-EFF9F52AAEFB}" type="datetimeFigureOut">
               <a:rPr lang="en-US" smtClean="0"/>
-              <a:t>10/5/2025</a:t>
+              <a:t>8/30/2026</a:t>
             </a:fld>
             <a:endParaRPr lang="en-US"/>
           </a:p>
@@ -664,7 +679,7 @@
           <a:p>
             <a:fld id="{DBB1ACE0-7167-418E-A7EF-EFF9F52AAEFB}" type="datetimeFigureOut">
               <a:rPr lang="en-US" smtClean="0"/>
-              <a:t>10/5/2025</a:t>
+              <a:t>8/30/2026</a:t>
             </a:fld>
             <a:endParaRPr lang="en-US"/>
           </a:p>
@@ -862,7 +877,7 @@
           <a:p>
             <a:fld id="{DBB1ACE0-7167-418E-A7EF-EFF9F52AAEFB}" type="datetimeFigureOut">
               <a:rPr lang="en-US" smtClean="0"/>
-              <a:t>10/5/2025</a:t>
+              <a:t>8/30/2026</a:t>
             </a:fld>
             <a:endParaRPr lang="en-US"/>
           </a:p>
@@ -1137,7 +1152,7 @@
           <a:p>
             <a:fld id="{DBB1ACE0-7167-418E-A7EF-EFF9F52AAEFB}" type="datetimeFigureOut">
               <a:rPr lang="en-US" smtClean="0"/>
-              <a:t>10/5/2025</a:t>
+              <a:t>8/30/2026</a:t>
             </a:fld>
             <a:endParaRPr lang="en-US"/>
           </a:p>
@@ -1402,7 +1417,7 @@
           <a:p>
             <a:fld id="{DBB1ACE0-7167-418E-A7EF-EFF9F52AAEFB}" type="datetimeFigureOut">
               <a:rPr lang="en-US" smtClean="0"/>
-              <a:t>10/5/2025</a:t>
+              <a:t>8/30/2026</a:t>
             </a:fld>
             <a:endParaRPr lang="en-US"/>
           </a:p>
@@ -1814,7 +1829,7 @@
           <a:p>
             <a:fld id="{DBB1ACE0-7167-418E-A7EF-EFF9F52AAEFB}" type="datetimeFigureOut">
               <a:rPr lang="en-US" smtClean="0"/>
-              <a:t>10/5/2025</a:t>
+              <a:t>8/30/2026</a:t>
             </a:fld>
             <a:endParaRPr lang="en-US"/>
           </a:p>
@@ -1955,7 +1970,7 @@
           <a:p>
             <a:fld id="{DBB1ACE0-7167-418E-A7EF-EFF9F52AAEFB}" type="datetimeFigureOut">
               <a:rPr lang="en-US" smtClean="0"/>
-              <a:t>10/5/2025</a:t>
+              <a:t>8/30/2026</a:t>
             </a:fld>
             <a:endParaRPr lang="en-US"/>
           </a:p>
@@ -2068,7 +2083,7 @@
           <a:p>
             <a:fld id="{DBB1ACE0-7167-418E-A7EF-EFF9F52AAEFB}" type="datetimeFigureOut">
               <a:rPr lang="en-US" smtClean="0"/>
-              <a:t>10/5/2025</a:t>
+              <a:t>8/30/2026</a:t>
             </a:fld>
             <a:endParaRPr lang="en-US"/>
           </a:p>
@@ -2379,7 +2394,7 @@
           <a:p>
             <a:fld id="{DBB1ACE0-7167-418E-A7EF-EFF9F52AAEFB}" type="datetimeFigureOut">
               <a:rPr lang="en-US" smtClean="0"/>
-              <a:t>10/5/2025</a:t>
+              <a:t>8/30/2026</a:t>
             </a:fld>
             <a:endParaRPr lang="en-US"/>
           </a:p>
@@ -2667,7 +2682,7 @@
           <a:p>
             <a:fld id="{DBB1ACE0-7167-418E-A7EF-EFF9F52AAEFB}" type="datetimeFigureOut">
               <a:rPr lang="en-US" smtClean="0"/>
-              <a:t>10/5/2025</a:t>
+              <a:t>8/30/2026</a:t>
             </a:fld>
             <a:endParaRPr lang="en-US"/>
           </a:p>
@@ -2908,7 +2923,7 @@
           <a:p>
             <a:fld id="{DBB1ACE0-7167-418E-A7EF-EFF9F52AAEFB}" type="datetimeFigureOut">
               <a:rPr lang="en-US" smtClean="0"/>
-              <a:t>10/5/2025</a:t>
+              <a:t>8/30/2026</a:t>
             </a:fld>
             <a:endParaRPr lang="en-US"/>
           </a:p>
@@ -3400,6 +3415,594 @@
 </p:sld>
 </file>
 
+<file path=ppt/slides/slide10.xml><?xml version="1.0" encoding="utf-8"?>
+<p:sld xmlns:a="http://schemas.openxmlformats.org/drawingml/2006/main" xmlns:r="http://schemas.openxmlformats.org/officeDocument/2006/relationships" xmlns:p="http://schemas.openxmlformats.org/presentationml/2006/main">
+  <p:cSld>
+    <p:spTree>
+      <p:nvGrpSpPr>
+        <p:cNvPr id="1" name=""/>
+        <p:cNvGrpSpPr/>
+        <p:nvPr/>
+      </p:nvGrpSpPr>
+      <p:grpSpPr>
+        <a:xfrm>
+          <a:off x="0" y="0"/>
+          <a:ext cx="0" cy="0"/>
+          <a:chOff x="0" y="0"/>
+          <a:chExt cx="0" cy="0"/>
+        </a:xfrm>
+      </p:grpSpPr>
+      <p:pic>
+        <p:nvPicPr>
+          <p:cNvPr id="7" name="Picture 6">
+            <a:extLst>
+              <a:ext uri="{FF2B5EF4-FFF2-40B4-BE49-F238E27FC236}">
+                <a16:creationId xmlns:a16="http://schemas.microsoft.com/office/drawing/2014/main" id="{6370FC87-D00E-FE30-3B7D-1D835CCB3D76}"/>
+              </a:ext>
+            </a:extLst>
+          </p:cNvPr>
+          <p:cNvPicPr>
+            <a:picLocks noChangeAspect="1"/>
+          </p:cNvPicPr>
+          <p:nvPr/>
+        </p:nvPicPr>
+        <p:blipFill>
+          <a:blip r:embed="rId2"/>
+          <a:stretch>
+            <a:fillRect/>
+          </a:stretch>
+        </p:blipFill>
+        <p:spPr>
+          <a:xfrm>
+            <a:off x="589286" y="484907"/>
+            <a:ext cx="10393225" cy="5315692"/>
+          </a:xfrm>
+          <a:prstGeom prst="rect">
+            <a:avLst/>
+          </a:prstGeom>
+        </p:spPr>
+      </p:pic>
+    </p:spTree>
+    <p:extLst>
+      <p:ext uri="{BB962C8B-B14F-4D97-AF65-F5344CB8AC3E}">
+        <p14:creationId xmlns:p14="http://schemas.microsoft.com/office/powerpoint/2010/main" val="3052016307"/>
+      </p:ext>
+    </p:extLst>
+  </p:cSld>
+  <p:clrMapOvr>
+    <a:masterClrMapping/>
+  </p:clrMapOvr>
+</p:sld>
+</file>
+
+<file path=ppt/slides/slide11.xml><?xml version="1.0" encoding="utf-8"?>
+<p:sld xmlns:a="http://schemas.openxmlformats.org/drawingml/2006/main" xmlns:r="http://schemas.openxmlformats.org/officeDocument/2006/relationships" xmlns:p="http://schemas.openxmlformats.org/presentationml/2006/main">
+  <p:cSld>
+    <p:spTree>
+      <p:nvGrpSpPr>
+        <p:cNvPr id="1" name=""/>
+        <p:cNvGrpSpPr/>
+        <p:nvPr/>
+      </p:nvGrpSpPr>
+      <p:grpSpPr>
+        <a:xfrm>
+          <a:off x="0" y="0"/>
+          <a:ext cx="0" cy="0"/>
+          <a:chOff x="0" y="0"/>
+          <a:chExt cx="0" cy="0"/>
+        </a:xfrm>
+      </p:grpSpPr>
+      <p:pic>
+        <p:nvPicPr>
+          <p:cNvPr id="5" name="Picture 4">
+            <a:extLst>
+              <a:ext uri="{FF2B5EF4-FFF2-40B4-BE49-F238E27FC236}">
+                <a16:creationId xmlns:a16="http://schemas.microsoft.com/office/drawing/2014/main" id="{E019ECEE-9A5F-1974-03F5-F8BD168605BE}"/>
+              </a:ext>
+            </a:extLst>
+          </p:cNvPr>
+          <p:cNvPicPr>
+            <a:picLocks noChangeAspect="1"/>
+          </p:cNvPicPr>
+          <p:nvPr/>
+        </p:nvPicPr>
+        <p:blipFill>
+          <a:blip r:embed="rId2"/>
+          <a:stretch>
+            <a:fillRect/>
+          </a:stretch>
+        </p:blipFill>
+        <p:spPr>
+          <a:xfrm>
+            <a:off x="184484" y="762000"/>
+            <a:ext cx="12192000" cy="5334000"/>
+          </a:xfrm>
+          <a:prstGeom prst="rect">
+            <a:avLst/>
+          </a:prstGeom>
+        </p:spPr>
+      </p:pic>
+      <p:pic>
+        <p:nvPicPr>
+          <p:cNvPr id="7" name="Picture 6">
+            <a:extLst>
+              <a:ext uri="{FF2B5EF4-FFF2-40B4-BE49-F238E27FC236}">
+                <a16:creationId xmlns:a16="http://schemas.microsoft.com/office/drawing/2014/main" id="{DC246A70-AAB7-87CF-973C-2B3AA15A5E33}"/>
+              </a:ext>
+            </a:extLst>
+          </p:cNvPr>
+          <p:cNvPicPr>
+            <a:picLocks noChangeAspect="1"/>
+          </p:cNvPicPr>
+          <p:nvPr/>
+        </p:nvPicPr>
+        <p:blipFill>
+          <a:blip r:embed="rId3"/>
+          <a:stretch>
+            <a:fillRect/>
+          </a:stretch>
+        </p:blipFill>
+        <p:spPr>
+          <a:xfrm>
+            <a:off x="8290926" y="4674361"/>
+            <a:ext cx="4316122" cy="2844828"/>
+          </a:xfrm>
+          <a:prstGeom prst="rect">
+            <a:avLst/>
+          </a:prstGeom>
+        </p:spPr>
+      </p:pic>
+      <p:sp>
+        <p:nvSpPr>
+          <p:cNvPr id="9" name="TextBox 8">
+            <a:extLst>
+              <a:ext uri="{FF2B5EF4-FFF2-40B4-BE49-F238E27FC236}">
+                <a16:creationId xmlns:a16="http://schemas.microsoft.com/office/drawing/2014/main" id="{6F7C40DB-434A-F75E-A68C-2E626D811BAA}"/>
+              </a:ext>
+            </a:extLst>
+          </p:cNvPr>
+          <p:cNvSpPr txBox="1"/>
+          <p:nvPr/>
+        </p:nvSpPr>
+        <p:spPr>
+          <a:xfrm>
+            <a:off x="184484" y="155007"/>
+            <a:ext cx="2558716" cy="369332"/>
+          </a:xfrm>
+          <a:prstGeom prst="rect">
+            <a:avLst/>
+          </a:prstGeom>
+          <a:noFill/>
+        </p:spPr>
+        <p:txBody>
+          <a:bodyPr wrap="square">
+            <a:spAutoFit/>
+          </a:bodyPr>
+          <a:lstStyle/>
+          <a:p>
+            <a:pPr algn="ctr"/>
+            <a:r>
+              <a:rPr lang="en-US" dirty="0"/>
+              <a:t>WPD5:7.5-9.5 GHz</a:t>
+            </a:r>
+          </a:p>
+        </p:txBody>
+      </p:sp>
+    </p:spTree>
+    <p:extLst>
+      <p:ext uri="{BB962C8B-B14F-4D97-AF65-F5344CB8AC3E}">
+        <p14:creationId xmlns:p14="http://schemas.microsoft.com/office/powerpoint/2010/main" val="3733163650"/>
+      </p:ext>
+    </p:extLst>
+  </p:cSld>
+  <p:clrMapOvr>
+    <a:masterClrMapping/>
+  </p:clrMapOvr>
+</p:sld>
+</file>
+
+<file path=ppt/slides/slide12.xml><?xml version="1.0" encoding="utf-8"?>
+<p:sld xmlns:a="http://schemas.openxmlformats.org/drawingml/2006/main" xmlns:r="http://schemas.openxmlformats.org/officeDocument/2006/relationships" xmlns:p="http://schemas.openxmlformats.org/presentationml/2006/main">
+  <p:cSld>
+    <p:spTree>
+      <p:nvGrpSpPr>
+        <p:cNvPr id="1" name=""/>
+        <p:cNvGrpSpPr/>
+        <p:nvPr/>
+      </p:nvGrpSpPr>
+      <p:grpSpPr>
+        <a:xfrm>
+          <a:off x="0" y="0"/>
+          <a:ext cx="0" cy="0"/>
+          <a:chOff x="0" y="0"/>
+          <a:chExt cx="0" cy="0"/>
+        </a:xfrm>
+      </p:grpSpPr>
+      <p:pic>
+        <p:nvPicPr>
+          <p:cNvPr id="5" name="Picture 4">
+            <a:extLst>
+              <a:ext uri="{FF2B5EF4-FFF2-40B4-BE49-F238E27FC236}">
+                <a16:creationId xmlns:a16="http://schemas.microsoft.com/office/drawing/2014/main" id="{F120DF3D-25EE-CDCE-0FB7-9E803F1F2B02}"/>
+              </a:ext>
+            </a:extLst>
+          </p:cNvPr>
+          <p:cNvPicPr>
+            <a:picLocks noChangeAspect="1"/>
+          </p:cNvPicPr>
+          <p:nvPr/>
+        </p:nvPicPr>
+        <p:blipFill>
+          <a:blip r:embed="rId2"/>
+          <a:stretch>
+            <a:fillRect/>
+          </a:stretch>
+        </p:blipFill>
+        <p:spPr>
+          <a:xfrm>
+            <a:off x="94509" y="765530"/>
+            <a:ext cx="12192000" cy="5326940"/>
+          </a:xfrm>
+          <a:prstGeom prst="rect">
+            <a:avLst/>
+          </a:prstGeom>
+        </p:spPr>
+      </p:pic>
+      <p:sp>
+        <p:nvSpPr>
+          <p:cNvPr id="7" name="TextBox 6">
+            <a:extLst>
+              <a:ext uri="{FF2B5EF4-FFF2-40B4-BE49-F238E27FC236}">
+                <a16:creationId xmlns:a16="http://schemas.microsoft.com/office/drawing/2014/main" id="{8BBEE20D-063F-27ED-1C55-0284EC3F3848}"/>
+              </a:ext>
+            </a:extLst>
+          </p:cNvPr>
+          <p:cNvSpPr txBox="1"/>
+          <p:nvPr/>
+        </p:nvSpPr>
+        <p:spPr>
+          <a:xfrm>
+            <a:off x="256674" y="256646"/>
+            <a:ext cx="2558716" cy="369332"/>
+          </a:xfrm>
+          <a:prstGeom prst="rect">
+            <a:avLst/>
+          </a:prstGeom>
+          <a:noFill/>
+        </p:spPr>
+        <p:txBody>
+          <a:bodyPr wrap="square">
+            <a:spAutoFit/>
+          </a:bodyPr>
+          <a:lstStyle/>
+          <a:p>
+            <a:pPr algn="ctr"/>
+            <a:r>
+              <a:rPr lang="en-US" dirty="0"/>
+              <a:t>WPD5:7.5-9.5 GHz</a:t>
+            </a:r>
+          </a:p>
+        </p:txBody>
+      </p:sp>
+    </p:spTree>
+    <p:extLst>
+      <p:ext uri="{BB962C8B-B14F-4D97-AF65-F5344CB8AC3E}">
+        <p14:creationId xmlns:p14="http://schemas.microsoft.com/office/powerpoint/2010/main" val="4024270338"/>
+      </p:ext>
+    </p:extLst>
+  </p:cSld>
+  <p:clrMapOvr>
+    <a:masterClrMapping/>
+  </p:clrMapOvr>
+</p:sld>
+</file>
+
+<file path=ppt/slides/slide13.xml><?xml version="1.0" encoding="utf-8"?>
+<p:sld xmlns:a="http://schemas.openxmlformats.org/drawingml/2006/main" xmlns:r="http://schemas.openxmlformats.org/officeDocument/2006/relationships" xmlns:p="http://schemas.openxmlformats.org/presentationml/2006/main">
+  <p:cSld>
+    <p:spTree>
+      <p:nvGrpSpPr>
+        <p:cNvPr id="1" name=""/>
+        <p:cNvGrpSpPr/>
+        <p:nvPr/>
+      </p:nvGrpSpPr>
+      <p:grpSpPr>
+        <a:xfrm>
+          <a:off x="0" y="0"/>
+          <a:ext cx="0" cy="0"/>
+          <a:chOff x="0" y="0"/>
+          <a:chExt cx="0" cy="0"/>
+        </a:xfrm>
+      </p:grpSpPr>
+      <p:pic>
+        <p:nvPicPr>
+          <p:cNvPr id="3" name="Picture 2">
+            <a:extLst>
+              <a:ext uri="{FF2B5EF4-FFF2-40B4-BE49-F238E27FC236}">
+                <a16:creationId xmlns:a16="http://schemas.microsoft.com/office/drawing/2014/main" id="{9FBFBBE0-7EF1-FA81-2A95-11D3932910A1}"/>
+              </a:ext>
+            </a:extLst>
+          </p:cNvPr>
+          <p:cNvPicPr>
+            <a:picLocks noChangeAspect="1"/>
+          </p:cNvPicPr>
+          <p:nvPr/>
+        </p:nvPicPr>
+        <p:blipFill>
+          <a:blip r:embed="rId2"/>
+          <a:stretch>
+            <a:fillRect/>
+          </a:stretch>
+        </p:blipFill>
+        <p:spPr>
+          <a:xfrm>
+            <a:off x="84080" y="0"/>
+            <a:ext cx="12192000" cy="5426347"/>
+          </a:xfrm>
+          <a:prstGeom prst="rect">
+            <a:avLst/>
+          </a:prstGeom>
+        </p:spPr>
+      </p:pic>
+      <p:pic>
+        <p:nvPicPr>
+          <p:cNvPr id="5" name="Picture 4">
+            <a:extLst>
+              <a:ext uri="{FF2B5EF4-FFF2-40B4-BE49-F238E27FC236}">
+                <a16:creationId xmlns:a16="http://schemas.microsoft.com/office/drawing/2014/main" id="{97C27B66-8650-8377-CDFB-146E327EE57F}"/>
+              </a:ext>
+            </a:extLst>
+          </p:cNvPr>
+          <p:cNvPicPr>
+            <a:picLocks noChangeAspect="1"/>
+          </p:cNvPicPr>
+          <p:nvPr/>
+        </p:nvPicPr>
+        <p:blipFill>
+          <a:blip r:embed="rId3"/>
+          <a:srcRect l="14177" t="8661" r="12985" b="13771"/>
+          <a:stretch>
+            <a:fillRect/>
+          </a:stretch>
+        </p:blipFill>
+        <p:spPr>
+          <a:xfrm>
+            <a:off x="9085634" y="3599235"/>
+            <a:ext cx="2322502" cy="2665378"/>
+          </a:xfrm>
+          <a:prstGeom prst="rect">
+            <a:avLst/>
+          </a:prstGeom>
+        </p:spPr>
+      </p:pic>
+    </p:spTree>
+    <p:extLst>
+      <p:ext uri="{BB962C8B-B14F-4D97-AF65-F5344CB8AC3E}">
+        <p14:creationId xmlns:p14="http://schemas.microsoft.com/office/powerpoint/2010/main" val="4030373927"/>
+      </p:ext>
+    </p:extLst>
+  </p:cSld>
+  <p:clrMapOvr>
+    <a:masterClrMapping/>
+  </p:clrMapOvr>
+</p:sld>
+</file>
+
+<file path=ppt/slides/slide14.xml><?xml version="1.0" encoding="utf-8"?>
+<p:sld xmlns:a="http://schemas.openxmlformats.org/drawingml/2006/main" xmlns:r="http://schemas.openxmlformats.org/officeDocument/2006/relationships" xmlns:p="http://schemas.openxmlformats.org/presentationml/2006/main">
+  <p:cSld>
+    <p:spTree>
+      <p:nvGrpSpPr>
+        <p:cNvPr id="1" name=""/>
+        <p:cNvGrpSpPr/>
+        <p:nvPr/>
+      </p:nvGrpSpPr>
+      <p:grpSpPr>
+        <a:xfrm>
+          <a:off x="0" y="0"/>
+          <a:ext cx="0" cy="0"/>
+          <a:chOff x="0" y="0"/>
+          <a:chExt cx="0" cy="0"/>
+        </a:xfrm>
+      </p:grpSpPr>
+      <p:pic>
+        <p:nvPicPr>
+          <p:cNvPr id="3" name="Picture 2">
+            <a:extLst>
+              <a:ext uri="{FF2B5EF4-FFF2-40B4-BE49-F238E27FC236}">
+                <a16:creationId xmlns:a16="http://schemas.microsoft.com/office/drawing/2014/main" id="{A433C89B-BEA3-592D-EED8-3017C23B5E37}"/>
+              </a:ext>
+            </a:extLst>
+          </p:cNvPr>
+          <p:cNvPicPr>
+            <a:picLocks noChangeAspect="1"/>
+          </p:cNvPicPr>
+          <p:nvPr/>
+        </p:nvPicPr>
+        <p:blipFill>
+          <a:blip r:embed="rId2"/>
+          <a:stretch>
+            <a:fillRect/>
+          </a:stretch>
+        </p:blipFill>
+        <p:spPr>
+          <a:xfrm>
+            <a:off x="275617" y="370329"/>
+            <a:ext cx="12192000" cy="5423550"/>
+          </a:xfrm>
+          <a:prstGeom prst="rect">
+            <a:avLst/>
+          </a:prstGeom>
+        </p:spPr>
+      </p:pic>
+      <p:pic>
+        <p:nvPicPr>
+          <p:cNvPr id="5" name="Picture 4">
+            <a:extLst>
+              <a:ext uri="{FF2B5EF4-FFF2-40B4-BE49-F238E27FC236}">
+                <a16:creationId xmlns:a16="http://schemas.microsoft.com/office/drawing/2014/main" id="{DE0F07B6-00D7-7EDD-3DFC-AE8FA67679D3}"/>
+              </a:ext>
+            </a:extLst>
+          </p:cNvPr>
+          <p:cNvPicPr>
+            <a:picLocks noChangeAspect="1"/>
+          </p:cNvPicPr>
+          <p:nvPr/>
+        </p:nvPicPr>
+        <p:blipFill>
+          <a:blip r:embed="rId3"/>
+          <a:stretch>
+            <a:fillRect/>
+          </a:stretch>
+        </p:blipFill>
+        <p:spPr>
+          <a:xfrm>
+            <a:off x="9182910" y="4312054"/>
+            <a:ext cx="2470825" cy="2364879"/>
+          </a:xfrm>
+          <a:prstGeom prst="rect">
+            <a:avLst/>
+          </a:prstGeom>
+        </p:spPr>
+      </p:pic>
+      <p:sp>
+        <p:nvSpPr>
+          <p:cNvPr id="6" name="TextBox 5">
+            <a:extLst>
+              <a:ext uri="{FF2B5EF4-FFF2-40B4-BE49-F238E27FC236}">
+                <a16:creationId xmlns:a16="http://schemas.microsoft.com/office/drawing/2014/main" id="{5542DB52-16D4-2E95-7E8E-E7C62905B6F0}"/>
+              </a:ext>
+            </a:extLst>
+          </p:cNvPr>
+          <p:cNvSpPr txBox="1"/>
+          <p:nvPr/>
+        </p:nvSpPr>
+        <p:spPr>
+          <a:xfrm>
+            <a:off x="437745" y="326980"/>
+            <a:ext cx="3599234" cy="369332"/>
+          </a:xfrm>
+          <a:prstGeom prst="rect">
+            <a:avLst/>
+          </a:prstGeom>
+          <a:noFill/>
+        </p:spPr>
+        <p:txBody>
+          <a:bodyPr wrap="square" rtlCol="0">
+            <a:spAutoFit/>
+          </a:bodyPr>
+          <a:lstStyle/>
+          <a:p>
+            <a:r>
+              <a:rPr lang="en-US" dirty="0"/>
+              <a:t>Wpd5_v3_output_port</a:t>
+            </a:r>
+          </a:p>
+        </p:txBody>
+      </p:sp>
+    </p:spTree>
+    <p:extLst>
+      <p:ext uri="{BB962C8B-B14F-4D97-AF65-F5344CB8AC3E}">
+        <p14:creationId xmlns:p14="http://schemas.microsoft.com/office/powerpoint/2010/main" val="2827325336"/>
+      </p:ext>
+    </p:extLst>
+  </p:cSld>
+  <p:clrMapOvr>
+    <a:masterClrMapping/>
+  </p:clrMapOvr>
+</p:sld>
+</file>
+
+<file path=ppt/slides/slide15.xml><?xml version="1.0" encoding="utf-8"?>
+<p:sld xmlns:a="http://schemas.openxmlformats.org/drawingml/2006/main" xmlns:r="http://schemas.openxmlformats.org/officeDocument/2006/relationships" xmlns:p="http://schemas.openxmlformats.org/presentationml/2006/main">
+  <p:cSld>
+    <p:spTree>
+      <p:nvGrpSpPr>
+        <p:cNvPr id="1" name=""/>
+        <p:cNvGrpSpPr/>
+        <p:nvPr/>
+      </p:nvGrpSpPr>
+      <p:grpSpPr>
+        <a:xfrm>
+          <a:off x="0" y="0"/>
+          <a:ext cx="0" cy="0"/>
+          <a:chOff x="0" y="0"/>
+          <a:chExt cx="0" cy="0"/>
+        </a:xfrm>
+      </p:grpSpPr>
+      <p:pic>
+        <p:nvPicPr>
+          <p:cNvPr id="3" name="Picture 2">
+            <a:extLst>
+              <a:ext uri="{FF2B5EF4-FFF2-40B4-BE49-F238E27FC236}">
+                <a16:creationId xmlns:a16="http://schemas.microsoft.com/office/drawing/2014/main" id="{3AF91390-78A0-E55B-D42F-9D830B86D3F1}"/>
+              </a:ext>
+            </a:extLst>
+          </p:cNvPr>
+          <p:cNvPicPr>
+            <a:picLocks noChangeAspect="1"/>
+          </p:cNvPicPr>
+          <p:nvPr/>
+        </p:nvPicPr>
+        <p:blipFill>
+          <a:blip r:embed="rId2"/>
+          <a:stretch>
+            <a:fillRect/>
+          </a:stretch>
+        </p:blipFill>
+        <p:spPr>
+          <a:xfrm>
+            <a:off x="214008" y="727413"/>
+            <a:ext cx="12192000" cy="5403173"/>
+          </a:xfrm>
+          <a:prstGeom prst="rect">
+            <a:avLst/>
+          </a:prstGeom>
+        </p:spPr>
+      </p:pic>
+      <p:pic>
+        <p:nvPicPr>
+          <p:cNvPr id="5" name="Picture 4">
+            <a:extLst>
+              <a:ext uri="{FF2B5EF4-FFF2-40B4-BE49-F238E27FC236}">
+                <a16:creationId xmlns:a16="http://schemas.microsoft.com/office/drawing/2014/main" id="{DFF545B0-BF2C-D180-4635-F1F8DF3C6CBF}"/>
+              </a:ext>
+            </a:extLst>
+          </p:cNvPr>
+          <p:cNvPicPr>
+            <a:picLocks noChangeAspect="1"/>
+          </p:cNvPicPr>
+          <p:nvPr/>
+        </p:nvPicPr>
+        <p:blipFill>
+          <a:blip r:embed="rId3"/>
+          <a:stretch>
+            <a:fillRect/>
+          </a:stretch>
+        </p:blipFill>
+        <p:spPr>
+          <a:xfrm>
+            <a:off x="9001300" y="98802"/>
+            <a:ext cx="2673459" cy="2410935"/>
+          </a:xfrm>
+          <a:prstGeom prst="rect">
+            <a:avLst/>
+          </a:prstGeom>
+        </p:spPr>
+      </p:pic>
+    </p:spTree>
+    <p:extLst>
+      <p:ext uri="{BB962C8B-B14F-4D97-AF65-F5344CB8AC3E}">
+        <p14:creationId xmlns:p14="http://schemas.microsoft.com/office/powerpoint/2010/main" val="3136810167"/>
+      </p:ext>
+    </p:extLst>
+  </p:cSld>
+  <p:clrMapOvr>
+    <a:masterClrMapping/>
+  </p:clrMapOvr>
+</p:sld>
+</file>
+
 <file path=ppt/slides/slide2.xml><?xml version="1.0" encoding="utf-8"?>
 <p:sld xmlns:a="http://schemas.openxmlformats.org/drawingml/2006/main" xmlns:r="http://schemas.openxmlformats.org/officeDocument/2006/relationships" xmlns:p="http://schemas.openxmlformats.org/presentationml/2006/main">
   <p:cSld>
@@ -3879,6 +4482,1769 @@
     <p:extLst>
       <p:ext uri="{BB962C8B-B14F-4D97-AF65-F5344CB8AC3E}">
         <p14:creationId xmlns:p14="http://schemas.microsoft.com/office/powerpoint/2010/main" val="296401761"/>
+      </p:ext>
+    </p:extLst>
+  </p:cSld>
+  <p:clrMapOvr>
+    <a:masterClrMapping/>
+  </p:clrMapOvr>
+</p:sld>
+</file>
+
+<file path=ppt/slides/slide6.xml><?xml version="1.0" encoding="utf-8"?>
+<p:sld xmlns:a="http://schemas.openxmlformats.org/drawingml/2006/main" xmlns:r="http://schemas.openxmlformats.org/officeDocument/2006/relationships" xmlns:p="http://schemas.openxmlformats.org/presentationml/2006/main">
+  <p:cSld>
+    <p:spTree>
+      <p:nvGrpSpPr>
+        <p:cNvPr id="1" name=""/>
+        <p:cNvGrpSpPr/>
+        <p:nvPr/>
+      </p:nvGrpSpPr>
+      <p:grpSpPr>
+        <a:xfrm>
+          <a:off x="0" y="0"/>
+          <a:ext cx="0" cy="0"/>
+          <a:chOff x="0" y="0"/>
+          <a:chExt cx="0" cy="0"/>
+        </a:xfrm>
+      </p:grpSpPr>
+      <p:sp>
+        <p:nvSpPr>
+          <p:cNvPr id="2" name="Title 1">
+            <a:extLst>
+              <a:ext uri="{FF2B5EF4-FFF2-40B4-BE49-F238E27FC236}">
+                <a16:creationId xmlns:a16="http://schemas.microsoft.com/office/drawing/2014/main" id="{438A9CFB-3939-2B41-7452-B07D594715E9}"/>
+              </a:ext>
+            </a:extLst>
+          </p:cNvPr>
+          <p:cNvSpPr>
+            <a:spLocks noGrp="1"/>
+          </p:cNvSpPr>
+          <p:nvPr>
+            <p:ph type="title"/>
+          </p:nvPr>
+        </p:nvSpPr>
+        <p:spPr/>
+        <p:txBody>
+          <a:bodyPr/>
+          <a:lstStyle/>
+          <a:p>
+            <a:pPr algn="ctr"/>
+            <a:r>
+              <a:rPr lang="en-US" dirty="0"/>
+              <a:t>NSF WPD</a:t>
+            </a:r>
+          </a:p>
+        </p:txBody>
+      </p:sp>
+    </p:spTree>
+    <p:extLst>
+      <p:ext uri="{BB962C8B-B14F-4D97-AF65-F5344CB8AC3E}">
+        <p14:creationId xmlns:p14="http://schemas.microsoft.com/office/powerpoint/2010/main" val="3399789816"/>
+      </p:ext>
+    </p:extLst>
+  </p:cSld>
+  <p:clrMapOvr>
+    <a:masterClrMapping/>
+  </p:clrMapOvr>
+</p:sld>
+</file>
+
+<file path=ppt/slides/slide7.xml><?xml version="1.0" encoding="utf-8"?>
+<p:sld xmlns:a="http://schemas.openxmlformats.org/drawingml/2006/main" xmlns:r="http://schemas.openxmlformats.org/officeDocument/2006/relationships" xmlns:p="http://schemas.openxmlformats.org/presentationml/2006/main">
+  <p:cSld>
+    <p:spTree>
+      <p:nvGrpSpPr>
+        <p:cNvPr id="1" name=""/>
+        <p:cNvGrpSpPr/>
+        <p:nvPr/>
+      </p:nvGrpSpPr>
+      <p:grpSpPr>
+        <a:xfrm>
+          <a:off x="0" y="0"/>
+          <a:ext cx="0" cy="0"/>
+          <a:chOff x="0" y="0"/>
+          <a:chExt cx="0" cy="0"/>
+        </a:xfrm>
+      </p:grpSpPr>
+      <p:grpSp>
+        <p:nvGrpSpPr>
+          <p:cNvPr id="30" name="Group 29">
+            <a:extLst>
+              <a:ext uri="{FF2B5EF4-FFF2-40B4-BE49-F238E27FC236}">
+                <a16:creationId xmlns:a16="http://schemas.microsoft.com/office/drawing/2014/main" id="{FA445F78-AE9D-AD03-BE90-5BD0A800274F}"/>
+              </a:ext>
+            </a:extLst>
+          </p:cNvPr>
+          <p:cNvGrpSpPr/>
+          <p:nvPr/>
+        </p:nvGrpSpPr>
+        <p:grpSpPr>
+          <a:xfrm>
+            <a:off x="1026696" y="1024921"/>
+            <a:ext cx="5411702" cy="4808158"/>
+            <a:chOff x="794084" y="881955"/>
+            <a:chExt cx="5411702" cy="4808158"/>
+          </a:xfrm>
+        </p:grpSpPr>
+        <p:sp>
+          <p:nvSpPr>
+            <p:cNvPr id="4" name="Left Brace 3">
+              <a:extLst>
+                <a:ext uri="{FF2B5EF4-FFF2-40B4-BE49-F238E27FC236}">
+                  <a16:creationId xmlns:a16="http://schemas.microsoft.com/office/drawing/2014/main" id="{DBB2F599-4262-00CF-230B-852A7CBF1FE7}"/>
+                </a:ext>
+              </a:extLst>
+            </p:cNvPr>
+            <p:cNvSpPr/>
+            <p:nvPr/>
+          </p:nvSpPr>
+          <p:spPr>
+            <a:xfrm>
+              <a:off x="1756610" y="1997242"/>
+              <a:ext cx="585537" cy="2269960"/>
+            </a:xfrm>
+            <a:prstGeom prst="leftBrace">
+              <a:avLst/>
+            </a:prstGeom>
+          </p:spPr>
+          <p:style>
+            <a:lnRef idx="2">
+              <a:schemeClr val="accent1"/>
+            </a:lnRef>
+            <a:fillRef idx="0">
+              <a:schemeClr val="accent1"/>
+            </a:fillRef>
+            <a:effectRef idx="1">
+              <a:schemeClr val="accent1"/>
+            </a:effectRef>
+            <a:fontRef idx="minor">
+              <a:schemeClr val="tx1"/>
+            </a:fontRef>
+          </p:style>
+          <p:txBody>
+            <a:bodyPr rtlCol="0" anchor="ctr"/>
+            <a:lstStyle/>
+            <a:p>
+              <a:pPr algn="ctr"/>
+              <a:endParaRPr lang="en-US"/>
+            </a:p>
+          </p:txBody>
+        </p:sp>
+        <p:sp>
+          <p:nvSpPr>
+            <p:cNvPr id="5" name="Rectangle 4">
+              <a:extLst>
+                <a:ext uri="{FF2B5EF4-FFF2-40B4-BE49-F238E27FC236}">
+                  <a16:creationId xmlns:a16="http://schemas.microsoft.com/office/drawing/2014/main" id="{E6288B79-3060-AE08-EB8D-90ABE973AE29}"/>
+                </a:ext>
+              </a:extLst>
+            </p:cNvPr>
+            <p:cNvSpPr/>
+            <p:nvPr/>
+          </p:nvSpPr>
+          <p:spPr>
+            <a:xfrm>
+              <a:off x="794084" y="2867527"/>
+              <a:ext cx="914400" cy="529389"/>
+            </a:xfrm>
+            <a:prstGeom prst="rect">
+              <a:avLst/>
+            </a:prstGeom>
+          </p:spPr>
+          <p:style>
+            <a:lnRef idx="2">
+              <a:schemeClr val="accent1">
+                <a:shade val="15000"/>
+              </a:schemeClr>
+            </a:lnRef>
+            <a:fillRef idx="1">
+              <a:schemeClr val="accent1"/>
+            </a:fillRef>
+            <a:effectRef idx="0">
+              <a:schemeClr val="accent1"/>
+            </a:effectRef>
+            <a:fontRef idx="minor">
+              <a:schemeClr val="lt1"/>
+            </a:fontRef>
+          </p:style>
+          <p:txBody>
+            <a:bodyPr rtlCol="0" anchor="ctr"/>
+            <a:lstStyle/>
+            <a:p>
+              <a:pPr algn="ctr"/>
+              <a:r>
+                <a:rPr lang="en-US" dirty="0"/>
+                <a:t>Commercial</a:t>
+              </a:r>
+            </a:p>
+          </p:txBody>
+        </p:sp>
+        <p:sp>
+          <p:nvSpPr>
+            <p:cNvPr id="6" name="Rectangle 5">
+              <a:extLst>
+                <a:ext uri="{FF2B5EF4-FFF2-40B4-BE49-F238E27FC236}">
+                  <a16:creationId xmlns:a16="http://schemas.microsoft.com/office/drawing/2014/main" id="{71246AF1-9688-E87E-05C8-AB08D9373B91}"/>
+                </a:ext>
+              </a:extLst>
+            </p:cNvPr>
+            <p:cNvSpPr/>
+            <p:nvPr/>
+          </p:nvSpPr>
+          <p:spPr>
+            <a:xfrm>
+              <a:off x="2390273" y="1736556"/>
+              <a:ext cx="914400" cy="529389"/>
+            </a:xfrm>
+            <a:prstGeom prst="rect">
+              <a:avLst/>
+            </a:prstGeom>
+          </p:spPr>
+          <p:style>
+            <a:lnRef idx="2">
+              <a:schemeClr val="accent1">
+                <a:shade val="15000"/>
+              </a:schemeClr>
+            </a:lnRef>
+            <a:fillRef idx="1">
+              <a:schemeClr val="accent1"/>
+            </a:fillRef>
+            <a:effectRef idx="0">
+              <a:schemeClr val="accent1"/>
+            </a:effectRef>
+            <a:fontRef idx="minor">
+              <a:schemeClr val="lt1"/>
+            </a:fontRef>
+          </p:style>
+          <p:txBody>
+            <a:bodyPr rtlCol="0" anchor="ctr"/>
+            <a:lstStyle/>
+            <a:p>
+              <a:pPr algn="ctr"/>
+              <a:r>
+                <a:rPr lang="en-US" dirty="0"/>
+                <a:t>WPD1</a:t>
+              </a:r>
+            </a:p>
+          </p:txBody>
+        </p:sp>
+        <p:sp>
+          <p:nvSpPr>
+            <p:cNvPr id="7" name="Rectangle 6">
+              <a:extLst>
+                <a:ext uri="{FF2B5EF4-FFF2-40B4-BE49-F238E27FC236}">
+                  <a16:creationId xmlns:a16="http://schemas.microsoft.com/office/drawing/2014/main" id="{F50281C3-A495-024E-23F3-CB6AFD0F35C6}"/>
+                </a:ext>
+              </a:extLst>
+            </p:cNvPr>
+            <p:cNvSpPr/>
+            <p:nvPr/>
+          </p:nvSpPr>
+          <p:spPr>
+            <a:xfrm>
+              <a:off x="3926304" y="1171072"/>
+              <a:ext cx="914400" cy="529389"/>
+            </a:xfrm>
+            <a:prstGeom prst="rect">
+              <a:avLst/>
+            </a:prstGeom>
+          </p:spPr>
+          <p:style>
+            <a:lnRef idx="2">
+              <a:schemeClr val="accent1">
+                <a:shade val="15000"/>
+              </a:schemeClr>
+            </a:lnRef>
+            <a:fillRef idx="1">
+              <a:schemeClr val="accent1"/>
+            </a:fillRef>
+            <a:effectRef idx="0">
+              <a:schemeClr val="accent1"/>
+            </a:effectRef>
+            <a:fontRef idx="minor">
+              <a:schemeClr val="lt1"/>
+            </a:fontRef>
+          </p:style>
+          <p:txBody>
+            <a:bodyPr rtlCol="0" anchor="ctr"/>
+            <a:lstStyle/>
+            <a:p>
+              <a:pPr algn="ctr"/>
+              <a:r>
+                <a:rPr lang="en-US" dirty="0"/>
+                <a:t>WPD3</a:t>
+              </a:r>
+            </a:p>
+          </p:txBody>
+        </p:sp>
+        <p:sp>
+          <p:nvSpPr>
+            <p:cNvPr id="8" name="Rectangle 7">
+              <a:extLst>
+                <a:ext uri="{FF2B5EF4-FFF2-40B4-BE49-F238E27FC236}">
+                  <a16:creationId xmlns:a16="http://schemas.microsoft.com/office/drawing/2014/main" id="{F69F32E4-B098-6BA3-4E08-14534B62EFD7}"/>
+                </a:ext>
+              </a:extLst>
+            </p:cNvPr>
+            <p:cNvSpPr/>
+            <p:nvPr/>
+          </p:nvSpPr>
+          <p:spPr>
+            <a:xfrm>
+              <a:off x="2398294" y="3978441"/>
+              <a:ext cx="914400" cy="529389"/>
+            </a:xfrm>
+            <a:prstGeom prst="rect">
+              <a:avLst/>
+            </a:prstGeom>
+          </p:spPr>
+          <p:style>
+            <a:lnRef idx="2">
+              <a:schemeClr val="accent1">
+                <a:shade val="15000"/>
+              </a:schemeClr>
+            </a:lnRef>
+            <a:fillRef idx="1">
+              <a:schemeClr val="accent1"/>
+            </a:fillRef>
+            <a:effectRef idx="0">
+              <a:schemeClr val="accent1"/>
+            </a:effectRef>
+            <a:fontRef idx="minor">
+              <a:schemeClr val="lt1"/>
+            </a:fontRef>
+          </p:style>
+          <p:txBody>
+            <a:bodyPr rtlCol="0" anchor="ctr"/>
+            <a:lstStyle/>
+            <a:p>
+              <a:pPr algn="ctr"/>
+              <a:r>
+                <a:rPr lang="en-US" dirty="0"/>
+                <a:t>WPD2</a:t>
+              </a:r>
+            </a:p>
+          </p:txBody>
+        </p:sp>
+        <p:sp>
+          <p:nvSpPr>
+            <p:cNvPr id="9" name="Left Brace 8">
+              <a:extLst>
+                <a:ext uri="{FF2B5EF4-FFF2-40B4-BE49-F238E27FC236}">
+                  <a16:creationId xmlns:a16="http://schemas.microsoft.com/office/drawing/2014/main" id="{FEDBAECC-ACE4-BF39-367F-F1D3DAB0907C}"/>
+                </a:ext>
+              </a:extLst>
+            </p:cNvPr>
+            <p:cNvSpPr/>
+            <p:nvPr/>
+          </p:nvSpPr>
+          <p:spPr>
+            <a:xfrm>
+              <a:off x="3312694" y="1455819"/>
+              <a:ext cx="585537" cy="1074821"/>
+            </a:xfrm>
+            <a:prstGeom prst="leftBrace">
+              <a:avLst/>
+            </a:prstGeom>
+          </p:spPr>
+          <p:style>
+            <a:lnRef idx="2">
+              <a:schemeClr val="accent1"/>
+            </a:lnRef>
+            <a:fillRef idx="0">
+              <a:schemeClr val="accent1"/>
+            </a:fillRef>
+            <a:effectRef idx="1">
+              <a:schemeClr val="accent1"/>
+            </a:effectRef>
+            <a:fontRef idx="minor">
+              <a:schemeClr val="tx1"/>
+            </a:fontRef>
+          </p:style>
+          <p:txBody>
+            <a:bodyPr rtlCol="0" anchor="ctr"/>
+            <a:lstStyle/>
+            <a:p>
+              <a:pPr algn="ctr"/>
+              <a:endParaRPr lang="en-US"/>
+            </a:p>
+          </p:txBody>
+        </p:sp>
+        <p:sp>
+          <p:nvSpPr>
+            <p:cNvPr id="10" name="Rectangle 9">
+              <a:extLst>
+                <a:ext uri="{FF2B5EF4-FFF2-40B4-BE49-F238E27FC236}">
+                  <a16:creationId xmlns:a16="http://schemas.microsoft.com/office/drawing/2014/main" id="{D02517FB-3A99-D9C7-C8D0-C39B946B4560}"/>
+                </a:ext>
+              </a:extLst>
+            </p:cNvPr>
+            <p:cNvSpPr/>
+            <p:nvPr/>
+          </p:nvSpPr>
+          <p:spPr>
+            <a:xfrm>
+              <a:off x="3926304" y="2326107"/>
+              <a:ext cx="914400" cy="529389"/>
+            </a:xfrm>
+            <a:prstGeom prst="rect">
+              <a:avLst/>
+            </a:prstGeom>
+          </p:spPr>
+          <p:style>
+            <a:lnRef idx="2">
+              <a:schemeClr val="accent1">
+                <a:shade val="15000"/>
+              </a:schemeClr>
+            </a:lnRef>
+            <a:fillRef idx="1">
+              <a:schemeClr val="accent1"/>
+            </a:fillRef>
+            <a:effectRef idx="0">
+              <a:schemeClr val="accent1"/>
+            </a:effectRef>
+            <a:fontRef idx="minor">
+              <a:schemeClr val="lt1"/>
+            </a:fontRef>
+          </p:style>
+          <p:txBody>
+            <a:bodyPr rtlCol="0" anchor="ctr"/>
+            <a:lstStyle/>
+            <a:p>
+              <a:pPr algn="ctr"/>
+              <a:r>
+                <a:rPr lang="en-US" dirty="0"/>
+                <a:t>WPD4</a:t>
+              </a:r>
+            </a:p>
+          </p:txBody>
+        </p:sp>
+        <p:sp>
+          <p:nvSpPr>
+            <p:cNvPr id="11" name="Left Brace 10">
+              <a:extLst>
+                <a:ext uri="{FF2B5EF4-FFF2-40B4-BE49-F238E27FC236}">
+                  <a16:creationId xmlns:a16="http://schemas.microsoft.com/office/drawing/2014/main" id="{D68A53B2-B66D-2C11-7C84-9E18BFDADD7B}"/>
+                </a:ext>
+              </a:extLst>
+            </p:cNvPr>
+            <p:cNvSpPr/>
+            <p:nvPr/>
+          </p:nvSpPr>
+          <p:spPr>
+            <a:xfrm>
+              <a:off x="3312694" y="3729791"/>
+              <a:ext cx="585537" cy="1074821"/>
+            </a:xfrm>
+            <a:prstGeom prst="leftBrace">
+              <a:avLst/>
+            </a:prstGeom>
+          </p:spPr>
+          <p:style>
+            <a:lnRef idx="2">
+              <a:schemeClr val="accent1"/>
+            </a:lnRef>
+            <a:fillRef idx="0">
+              <a:schemeClr val="accent1"/>
+            </a:fillRef>
+            <a:effectRef idx="1">
+              <a:schemeClr val="accent1"/>
+            </a:effectRef>
+            <a:fontRef idx="minor">
+              <a:schemeClr val="tx1"/>
+            </a:fontRef>
+          </p:style>
+          <p:txBody>
+            <a:bodyPr rtlCol="0" anchor="ctr"/>
+            <a:lstStyle/>
+            <a:p>
+              <a:pPr algn="ctr"/>
+              <a:endParaRPr lang="en-US"/>
+            </a:p>
+          </p:txBody>
+        </p:sp>
+        <p:sp>
+          <p:nvSpPr>
+            <p:cNvPr id="12" name="Rectangle 11">
+              <a:extLst>
+                <a:ext uri="{FF2B5EF4-FFF2-40B4-BE49-F238E27FC236}">
+                  <a16:creationId xmlns:a16="http://schemas.microsoft.com/office/drawing/2014/main" id="{DD91DEC8-8B53-8106-740D-7A26485ADAD0}"/>
+                </a:ext>
+              </a:extLst>
+            </p:cNvPr>
+            <p:cNvSpPr/>
+            <p:nvPr/>
+          </p:nvSpPr>
+          <p:spPr>
+            <a:xfrm>
+              <a:off x="3946357" y="3533271"/>
+              <a:ext cx="914400" cy="529389"/>
+            </a:xfrm>
+            <a:prstGeom prst="rect">
+              <a:avLst/>
+            </a:prstGeom>
+          </p:spPr>
+          <p:style>
+            <a:lnRef idx="2">
+              <a:schemeClr val="accent1">
+                <a:shade val="15000"/>
+              </a:schemeClr>
+            </a:lnRef>
+            <a:fillRef idx="1">
+              <a:schemeClr val="accent1"/>
+            </a:fillRef>
+            <a:effectRef idx="0">
+              <a:schemeClr val="accent1"/>
+            </a:effectRef>
+            <a:fontRef idx="minor">
+              <a:schemeClr val="lt1"/>
+            </a:fontRef>
+          </p:style>
+          <p:txBody>
+            <a:bodyPr rtlCol="0" anchor="ctr"/>
+            <a:lstStyle/>
+            <a:p>
+              <a:pPr algn="ctr"/>
+              <a:r>
+                <a:rPr lang="en-US" dirty="0"/>
+                <a:t>WPD5</a:t>
+              </a:r>
+            </a:p>
+          </p:txBody>
+        </p:sp>
+        <p:sp>
+          <p:nvSpPr>
+            <p:cNvPr id="13" name="Rectangle 12">
+              <a:extLst>
+                <a:ext uri="{FF2B5EF4-FFF2-40B4-BE49-F238E27FC236}">
+                  <a16:creationId xmlns:a16="http://schemas.microsoft.com/office/drawing/2014/main" id="{BDB9C53F-0B9A-457C-355B-259DE3D57690}"/>
+                </a:ext>
+              </a:extLst>
+            </p:cNvPr>
+            <p:cNvSpPr/>
+            <p:nvPr/>
+          </p:nvSpPr>
+          <p:spPr>
+            <a:xfrm>
+              <a:off x="3954378" y="4784556"/>
+              <a:ext cx="914400" cy="529389"/>
+            </a:xfrm>
+            <a:prstGeom prst="rect">
+              <a:avLst/>
+            </a:prstGeom>
+          </p:spPr>
+          <p:style>
+            <a:lnRef idx="2">
+              <a:schemeClr val="accent1">
+                <a:shade val="15000"/>
+              </a:schemeClr>
+            </a:lnRef>
+            <a:fillRef idx="1">
+              <a:schemeClr val="accent1"/>
+            </a:fillRef>
+            <a:effectRef idx="0">
+              <a:schemeClr val="accent1"/>
+            </a:effectRef>
+            <a:fontRef idx="minor">
+              <a:schemeClr val="lt1"/>
+            </a:fontRef>
+          </p:style>
+          <p:txBody>
+            <a:bodyPr rtlCol="0" anchor="ctr"/>
+            <a:lstStyle/>
+            <a:p>
+              <a:pPr algn="ctr"/>
+              <a:r>
+                <a:rPr lang="en-US" dirty="0"/>
+                <a:t>WPD6</a:t>
+              </a:r>
+            </a:p>
+          </p:txBody>
+        </p:sp>
+        <p:sp>
+          <p:nvSpPr>
+            <p:cNvPr id="14" name="Left Brace 13">
+              <a:extLst>
+                <a:ext uri="{FF2B5EF4-FFF2-40B4-BE49-F238E27FC236}">
+                  <a16:creationId xmlns:a16="http://schemas.microsoft.com/office/drawing/2014/main" id="{BE36B864-B4EE-FE99-8E42-BAD54CA5C94F}"/>
+                </a:ext>
+              </a:extLst>
+            </p:cNvPr>
+            <p:cNvSpPr/>
+            <p:nvPr/>
+          </p:nvSpPr>
+          <p:spPr>
+            <a:xfrm>
+              <a:off x="4838698" y="1078276"/>
+              <a:ext cx="585537" cy="735939"/>
+            </a:xfrm>
+            <a:prstGeom prst="leftBrace">
+              <a:avLst/>
+            </a:prstGeom>
+          </p:spPr>
+          <p:style>
+            <a:lnRef idx="2">
+              <a:schemeClr val="accent1"/>
+            </a:lnRef>
+            <a:fillRef idx="0">
+              <a:schemeClr val="accent1"/>
+            </a:fillRef>
+            <a:effectRef idx="1">
+              <a:schemeClr val="accent1"/>
+            </a:effectRef>
+            <a:fontRef idx="minor">
+              <a:schemeClr val="tx1"/>
+            </a:fontRef>
+          </p:style>
+          <p:txBody>
+            <a:bodyPr rtlCol="0" anchor="ctr"/>
+            <a:lstStyle/>
+            <a:p>
+              <a:pPr algn="ctr"/>
+              <a:endParaRPr lang="en-US"/>
+            </a:p>
+          </p:txBody>
+        </p:sp>
+        <p:sp>
+          <p:nvSpPr>
+            <p:cNvPr id="19" name="TextBox 18">
+              <a:extLst>
+                <a:ext uri="{FF2B5EF4-FFF2-40B4-BE49-F238E27FC236}">
+                  <a16:creationId xmlns:a16="http://schemas.microsoft.com/office/drawing/2014/main" id="{FA9BD37D-BD28-7396-A0C5-9D39B2CC0F2D}"/>
+                </a:ext>
+              </a:extLst>
+            </p:cNvPr>
+            <p:cNvSpPr txBox="1"/>
+            <p:nvPr/>
+          </p:nvSpPr>
+          <p:spPr>
+            <a:xfrm>
+              <a:off x="5424235" y="881955"/>
+              <a:ext cx="661739" cy="369332"/>
+            </a:xfrm>
+            <a:prstGeom prst="rect">
+              <a:avLst/>
+            </a:prstGeom>
+            <a:noFill/>
+          </p:spPr>
+          <p:txBody>
+            <a:bodyPr wrap="square">
+              <a:spAutoFit/>
+            </a:bodyPr>
+            <a:lstStyle/>
+            <a:p>
+              <a:r>
+                <a:rPr lang="en-US" sz="1800" dirty="0">
+                  <a:effectLst/>
+                  <a:latin typeface="+mn-lt"/>
+                  <a:ea typeface="等线" panose="02010600030101010101" pitchFamily="2" charset="-122"/>
+                  <a:cs typeface="Times New Roman" panose="02020603050405020304" pitchFamily="18" charset="0"/>
+                </a:rPr>
+                <a:t>2.40 </a:t>
+              </a:r>
+              <a:endParaRPr lang="en-US" dirty="0"/>
+            </a:p>
+          </p:txBody>
+        </p:sp>
+        <p:sp>
+          <p:nvSpPr>
+            <p:cNvPr id="20" name="TextBox 19">
+              <a:extLst>
+                <a:ext uri="{FF2B5EF4-FFF2-40B4-BE49-F238E27FC236}">
+                  <a16:creationId xmlns:a16="http://schemas.microsoft.com/office/drawing/2014/main" id="{0A2D8CD5-BA8C-3C13-A1B1-274136AC564B}"/>
+                </a:ext>
+              </a:extLst>
+            </p:cNvPr>
+            <p:cNvSpPr txBox="1"/>
+            <p:nvPr/>
+          </p:nvSpPr>
+          <p:spPr>
+            <a:xfrm>
+              <a:off x="5434261" y="1603842"/>
+              <a:ext cx="661739" cy="369332"/>
+            </a:xfrm>
+            <a:prstGeom prst="rect">
+              <a:avLst/>
+            </a:prstGeom>
+            <a:noFill/>
+          </p:spPr>
+          <p:txBody>
+            <a:bodyPr wrap="square">
+              <a:spAutoFit/>
+            </a:bodyPr>
+            <a:lstStyle/>
+            <a:p>
+              <a:r>
+                <a:rPr lang="en-US" sz="1800" dirty="0">
+                  <a:effectLst/>
+                  <a:latin typeface="+mn-lt"/>
+                  <a:ea typeface="等线" panose="02010600030101010101" pitchFamily="2" charset="-122"/>
+                  <a:cs typeface="Times New Roman" panose="02020603050405020304" pitchFamily="18" charset="0"/>
+                </a:rPr>
+                <a:t>3.76 </a:t>
+              </a:r>
+              <a:endParaRPr lang="en-US" dirty="0"/>
+            </a:p>
+          </p:txBody>
+        </p:sp>
+        <p:sp>
+          <p:nvSpPr>
+            <p:cNvPr id="21" name="Left Brace 20">
+              <a:extLst>
+                <a:ext uri="{FF2B5EF4-FFF2-40B4-BE49-F238E27FC236}">
+                  <a16:creationId xmlns:a16="http://schemas.microsoft.com/office/drawing/2014/main" id="{DDED6541-B538-A687-CC32-93A47F765116}"/>
+                </a:ext>
+              </a:extLst>
+            </p:cNvPr>
+            <p:cNvSpPr/>
+            <p:nvPr/>
+          </p:nvSpPr>
+          <p:spPr>
+            <a:xfrm>
+              <a:off x="4838698" y="2222831"/>
+              <a:ext cx="585537" cy="735939"/>
+            </a:xfrm>
+            <a:prstGeom prst="leftBrace">
+              <a:avLst/>
+            </a:prstGeom>
+          </p:spPr>
+          <p:style>
+            <a:lnRef idx="2">
+              <a:schemeClr val="accent1"/>
+            </a:lnRef>
+            <a:fillRef idx="0">
+              <a:schemeClr val="accent1"/>
+            </a:fillRef>
+            <a:effectRef idx="1">
+              <a:schemeClr val="accent1"/>
+            </a:effectRef>
+            <a:fontRef idx="minor">
+              <a:schemeClr val="tx1"/>
+            </a:fontRef>
+          </p:style>
+          <p:txBody>
+            <a:bodyPr rtlCol="0" anchor="ctr"/>
+            <a:lstStyle/>
+            <a:p>
+              <a:pPr algn="ctr"/>
+              <a:endParaRPr lang="en-US"/>
+            </a:p>
+          </p:txBody>
+        </p:sp>
+        <p:sp>
+          <p:nvSpPr>
+            <p:cNvPr id="22" name="Left Brace 21">
+              <a:extLst>
+                <a:ext uri="{FF2B5EF4-FFF2-40B4-BE49-F238E27FC236}">
+                  <a16:creationId xmlns:a16="http://schemas.microsoft.com/office/drawing/2014/main" id="{CD744E10-B704-B7CC-4AE7-5BFB22849D52}"/>
+                </a:ext>
+              </a:extLst>
+            </p:cNvPr>
+            <p:cNvSpPr/>
+            <p:nvPr/>
+          </p:nvSpPr>
+          <p:spPr>
+            <a:xfrm>
+              <a:off x="4868778" y="3429995"/>
+              <a:ext cx="585537" cy="735939"/>
+            </a:xfrm>
+            <a:prstGeom prst="leftBrace">
+              <a:avLst/>
+            </a:prstGeom>
+          </p:spPr>
+          <p:style>
+            <a:lnRef idx="2">
+              <a:schemeClr val="accent1"/>
+            </a:lnRef>
+            <a:fillRef idx="0">
+              <a:schemeClr val="accent1"/>
+            </a:fillRef>
+            <a:effectRef idx="1">
+              <a:schemeClr val="accent1"/>
+            </a:effectRef>
+            <a:fontRef idx="minor">
+              <a:schemeClr val="tx1"/>
+            </a:fontRef>
+          </p:style>
+          <p:txBody>
+            <a:bodyPr rtlCol="0" anchor="ctr"/>
+            <a:lstStyle/>
+            <a:p>
+              <a:pPr algn="ctr"/>
+              <a:endParaRPr lang="en-US"/>
+            </a:p>
+          </p:txBody>
+        </p:sp>
+        <p:sp>
+          <p:nvSpPr>
+            <p:cNvPr id="23" name="Left Brace 22">
+              <a:extLst>
+                <a:ext uri="{FF2B5EF4-FFF2-40B4-BE49-F238E27FC236}">
+                  <a16:creationId xmlns:a16="http://schemas.microsoft.com/office/drawing/2014/main" id="{6FA89403-B701-D9E0-3BE1-2380EDAF4F07}"/>
+                </a:ext>
+              </a:extLst>
+            </p:cNvPr>
+            <p:cNvSpPr/>
+            <p:nvPr/>
+          </p:nvSpPr>
+          <p:spPr>
+            <a:xfrm>
+              <a:off x="4868778" y="4769508"/>
+              <a:ext cx="585537" cy="735939"/>
+            </a:xfrm>
+            <a:prstGeom prst="leftBrace">
+              <a:avLst/>
+            </a:prstGeom>
+          </p:spPr>
+          <p:style>
+            <a:lnRef idx="2">
+              <a:schemeClr val="accent1"/>
+            </a:lnRef>
+            <a:fillRef idx="0">
+              <a:schemeClr val="accent1"/>
+            </a:fillRef>
+            <a:effectRef idx="1">
+              <a:schemeClr val="accent1"/>
+            </a:effectRef>
+            <a:fontRef idx="minor">
+              <a:schemeClr val="tx1"/>
+            </a:fontRef>
+          </p:style>
+          <p:txBody>
+            <a:bodyPr rtlCol="0" anchor="ctr"/>
+            <a:lstStyle/>
+            <a:p>
+              <a:pPr algn="ctr"/>
+              <a:endParaRPr lang="en-US"/>
+            </a:p>
+          </p:txBody>
+        </p:sp>
+        <p:sp>
+          <p:nvSpPr>
+            <p:cNvPr id="24" name="TextBox 23">
+              <a:extLst>
+                <a:ext uri="{FF2B5EF4-FFF2-40B4-BE49-F238E27FC236}">
+                  <a16:creationId xmlns:a16="http://schemas.microsoft.com/office/drawing/2014/main" id="{841F4D02-0601-C7C0-98B8-58F91692CDA7}"/>
+                </a:ext>
+              </a:extLst>
+            </p:cNvPr>
+            <p:cNvSpPr txBox="1"/>
+            <p:nvPr/>
+          </p:nvSpPr>
+          <p:spPr>
+            <a:xfrm>
+              <a:off x="5410697" y="2019478"/>
+              <a:ext cx="661739" cy="369332"/>
+            </a:xfrm>
+            <a:prstGeom prst="rect">
+              <a:avLst/>
+            </a:prstGeom>
+            <a:noFill/>
+          </p:spPr>
+          <p:txBody>
+            <a:bodyPr wrap="square">
+              <a:spAutoFit/>
+            </a:bodyPr>
+            <a:lstStyle/>
+            <a:p>
+              <a:r>
+                <a:rPr lang="en-US" sz="1800" dirty="0">
+                  <a:effectLst/>
+                  <a:latin typeface="+mn-lt"/>
+                  <a:ea typeface="等线" panose="02010600030101010101" pitchFamily="2" charset="-122"/>
+                  <a:cs typeface="Times New Roman" panose="02020603050405020304" pitchFamily="18" charset="0"/>
+                </a:rPr>
+                <a:t>5.11 </a:t>
+              </a:r>
+              <a:endParaRPr lang="en-US" dirty="0"/>
+            </a:p>
+          </p:txBody>
+        </p:sp>
+        <p:sp>
+          <p:nvSpPr>
+            <p:cNvPr id="25" name="TextBox 24">
+              <a:extLst>
+                <a:ext uri="{FF2B5EF4-FFF2-40B4-BE49-F238E27FC236}">
+                  <a16:creationId xmlns:a16="http://schemas.microsoft.com/office/drawing/2014/main" id="{9C5EC165-3113-D8D7-6CB3-AE9B57B50F9A}"/>
+                </a:ext>
+              </a:extLst>
+            </p:cNvPr>
+            <p:cNvSpPr txBox="1"/>
+            <p:nvPr/>
+          </p:nvSpPr>
+          <p:spPr>
+            <a:xfrm>
+              <a:off x="5454315" y="2789490"/>
+              <a:ext cx="661739" cy="369332"/>
+            </a:xfrm>
+            <a:prstGeom prst="rect">
+              <a:avLst/>
+            </a:prstGeom>
+            <a:noFill/>
+          </p:spPr>
+          <p:txBody>
+            <a:bodyPr wrap="square">
+              <a:spAutoFit/>
+            </a:bodyPr>
+            <a:lstStyle/>
+            <a:p>
+              <a:r>
+                <a:rPr lang="en-US" sz="1800" dirty="0">
+                  <a:effectLst/>
+                  <a:latin typeface="+mn-lt"/>
+                  <a:ea typeface="等线" panose="02010600030101010101" pitchFamily="2" charset="-122"/>
+                  <a:cs typeface="Times New Roman" panose="02020603050405020304" pitchFamily="18" charset="0"/>
+                </a:rPr>
+                <a:t>6.47 </a:t>
+              </a:r>
+              <a:endParaRPr lang="en-US" dirty="0"/>
+            </a:p>
+          </p:txBody>
+        </p:sp>
+        <p:sp>
+          <p:nvSpPr>
+            <p:cNvPr id="26" name="TextBox 25">
+              <a:extLst>
+                <a:ext uri="{FF2B5EF4-FFF2-40B4-BE49-F238E27FC236}">
+                  <a16:creationId xmlns:a16="http://schemas.microsoft.com/office/drawing/2014/main" id="{A236E5E4-2C95-4D32-13BD-7770D835D799}"/>
+                </a:ext>
+              </a:extLst>
+            </p:cNvPr>
+            <p:cNvSpPr txBox="1"/>
+            <p:nvPr/>
+          </p:nvSpPr>
+          <p:spPr>
+            <a:xfrm>
+              <a:off x="5426241" y="3264205"/>
+              <a:ext cx="661739" cy="369332"/>
+            </a:xfrm>
+            <a:prstGeom prst="rect">
+              <a:avLst/>
+            </a:prstGeom>
+            <a:noFill/>
+          </p:spPr>
+          <p:txBody>
+            <a:bodyPr wrap="square">
+              <a:spAutoFit/>
+            </a:bodyPr>
+            <a:lstStyle/>
+            <a:p>
+              <a:r>
+                <a:rPr lang="en-US" sz="1800" dirty="0">
+                  <a:effectLst/>
+                  <a:latin typeface="+mn-lt"/>
+                  <a:ea typeface="等线" panose="02010600030101010101" pitchFamily="2" charset="-122"/>
+                  <a:cs typeface="Times New Roman" panose="02020603050405020304" pitchFamily="18" charset="0"/>
+                </a:rPr>
+                <a:t>7.83</a:t>
+              </a:r>
+              <a:endParaRPr lang="en-US" dirty="0"/>
+            </a:p>
+          </p:txBody>
+        </p:sp>
+        <p:sp>
+          <p:nvSpPr>
+            <p:cNvPr id="27" name="TextBox 26">
+              <a:extLst>
+                <a:ext uri="{FF2B5EF4-FFF2-40B4-BE49-F238E27FC236}">
+                  <a16:creationId xmlns:a16="http://schemas.microsoft.com/office/drawing/2014/main" id="{2AA94B60-4746-9117-4A0C-2CCCFBA42B49}"/>
+                </a:ext>
+              </a:extLst>
+            </p:cNvPr>
+            <p:cNvSpPr txBox="1"/>
+            <p:nvPr/>
+          </p:nvSpPr>
+          <p:spPr>
+            <a:xfrm>
+              <a:off x="5454315" y="3975138"/>
+              <a:ext cx="661739" cy="369332"/>
+            </a:xfrm>
+            <a:prstGeom prst="rect">
+              <a:avLst/>
+            </a:prstGeom>
+            <a:noFill/>
+          </p:spPr>
+          <p:txBody>
+            <a:bodyPr wrap="square">
+              <a:spAutoFit/>
+            </a:bodyPr>
+            <a:lstStyle/>
+            <a:p>
+              <a:r>
+                <a:rPr lang="en-US" sz="1800" dirty="0">
+                  <a:effectLst/>
+                  <a:latin typeface="+mn-lt"/>
+                  <a:ea typeface="等线" panose="02010600030101010101" pitchFamily="2" charset="-122"/>
+                  <a:cs typeface="Times New Roman" panose="02020603050405020304" pitchFamily="18" charset="0"/>
+                </a:rPr>
+                <a:t>9.19</a:t>
+              </a:r>
+              <a:endParaRPr lang="en-US" dirty="0"/>
+            </a:p>
+          </p:txBody>
+        </p:sp>
+        <p:sp>
+          <p:nvSpPr>
+            <p:cNvPr id="28" name="TextBox 27">
+              <a:extLst>
+                <a:ext uri="{FF2B5EF4-FFF2-40B4-BE49-F238E27FC236}">
+                  <a16:creationId xmlns:a16="http://schemas.microsoft.com/office/drawing/2014/main" id="{553D5AE3-9DC4-BF99-61BB-CC1E82C5FE66}"/>
+                </a:ext>
+              </a:extLst>
+            </p:cNvPr>
+            <p:cNvSpPr txBox="1"/>
+            <p:nvPr/>
+          </p:nvSpPr>
+          <p:spPr>
+            <a:xfrm>
+              <a:off x="5410697" y="4606726"/>
+              <a:ext cx="789072" cy="369332"/>
+            </a:xfrm>
+            <a:prstGeom prst="rect">
+              <a:avLst/>
+            </a:prstGeom>
+            <a:noFill/>
+          </p:spPr>
+          <p:txBody>
+            <a:bodyPr wrap="square">
+              <a:spAutoFit/>
+            </a:bodyPr>
+            <a:lstStyle/>
+            <a:p>
+              <a:r>
+                <a:rPr lang="en-US" sz="1800" dirty="0">
+                  <a:effectLst/>
+                  <a:latin typeface="+mn-lt"/>
+                  <a:ea typeface="等线" panose="02010600030101010101" pitchFamily="2" charset="-122"/>
+                  <a:cs typeface="Times New Roman" panose="02020603050405020304" pitchFamily="18" charset="0"/>
+                </a:rPr>
+                <a:t>10.54</a:t>
+              </a:r>
+              <a:endParaRPr lang="en-US" dirty="0"/>
+            </a:p>
+          </p:txBody>
+        </p:sp>
+        <p:sp>
+          <p:nvSpPr>
+            <p:cNvPr id="29" name="TextBox 28">
+              <a:extLst>
+                <a:ext uri="{FF2B5EF4-FFF2-40B4-BE49-F238E27FC236}">
+                  <a16:creationId xmlns:a16="http://schemas.microsoft.com/office/drawing/2014/main" id="{7A5411D5-3044-05FB-9807-1B3B3EEB0163}"/>
+                </a:ext>
+              </a:extLst>
+            </p:cNvPr>
+            <p:cNvSpPr txBox="1"/>
+            <p:nvPr/>
+          </p:nvSpPr>
+          <p:spPr>
+            <a:xfrm>
+              <a:off x="5416714" y="5320781"/>
+              <a:ext cx="789072" cy="369332"/>
+            </a:xfrm>
+            <a:prstGeom prst="rect">
+              <a:avLst/>
+            </a:prstGeom>
+            <a:noFill/>
+          </p:spPr>
+          <p:txBody>
+            <a:bodyPr wrap="square">
+              <a:spAutoFit/>
+            </a:bodyPr>
+            <a:lstStyle/>
+            <a:p>
+              <a:r>
+                <a:rPr lang="en-US" sz="1800" dirty="0">
+                  <a:effectLst/>
+                  <a:latin typeface="+mn-lt"/>
+                  <a:ea typeface="等线" panose="02010600030101010101" pitchFamily="2" charset="-122"/>
+                  <a:cs typeface="Times New Roman" panose="02020603050405020304" pitchFamily="18" charset="0"/>
+                </a:rPr>
+                <a:t>11.90</a:t>
+              </a:r>
+              <a:endParaRPr lang="en-US" dirty="0"/>
+            </a:p>
+          </p:txBody>
+        </p:sp>
+      </p:grpSp>
+    </p:spTree>
+    <p:extLst>
+      <p:ext uri="{BB962C8B-B14F-4D97-AF65-F5344CB8AC3E}">
+        <p14:creationId xmlns:p14="http://schemas.microsoft.com/office/powerpoint/2010/main" val="2247712962"/>
+      </p:ext>
+    </p:extLst>
+  </p:cSld>
+  <p:clrMapOvr>
+    <a:masterClrMapping/>
+  </p:clrMapOvr>
+</p:sld>
+</file>
+
+<file path=ppt/slides/slide8.xml><?xml version="1.0" encoding="utf-8"?>
+<p:sld xmlns:a="http://schemas.openxmlformats.org/drawingml/2006/main" xmlns:r="http://schemas.openxmlformats.org/officeDocument/2006/relationships" xmlns:p="http://schemas.openxmlformats.org/presentationml/2006/main">
+  <p:cSld>
+    <p:spTree>
+      <p:nvGrpSpPr>
+        <p:cNvPr id="1" name=""/>
+        <p:cNvGrpSpPr/>
+        <p:nvPr/>
+      </p:nvGrpSpPr>
+      <p:grpSpPr>
+        <a:xfrm>
+          <a:off x="0" y="0"/>
+          <a:ext cx="0" cy="0"/>
+          <a:chOff x="0" y="0"/>
+          <a:chExt cx="0" cy="0"/>
+        </a:xfrm>
+      </p:grpSpPr>
+      <p:sp>
+        <p:nvSpPr>
+          <p:cNvPr id="5" name="TextBox 4">
+            <a:extLst>
+              <a:ext uri="{FF2B5EF4-FFF2-40B4-BE49-F238E27FC236}">
+                <a16:creationId xmlns:a16="http://schemas.microsoft.com/office/drawing/2014/main" id="{18EA6876-6BE6-6E77-21E2-C21FF3463285}"/>
+              </a:ext>
+            </a:extLst>
+          </p:cNvPr>
+          <p:cNvSpPr txBox="1"/>
+          <p:nvPr/>
+        </p:nvSpPr>
+        <p:spPr>
+          <a:xfrm>
+            <a:off x="81363" y="122924"/>
+            <a:ext cx="2661838" cy="369332"/>
+          </a:xfrm>
+          <a:prstGeom prst="rect">
+            <a:avLst/>
+          </a:prstGeom>
+          <a:noFill/>
+        </p:spPr>
+        <p:txBody>
+          <a:bodyPr wrap="square">
+            <a:spAutoFit/>
+          </a:bodyPr>
+          <a:lstStyle/>
+          <a:p>
+            <a:pPr algn="ctr"/>
+            <a:r>
+              <a:rPr lang="en-US" sz="1800" dirty="0"/>
+              <a:t>WPD5:7.5-9.5 GHz</a:t>
+            </a:r>
+          </a:p>
+        </p:txBody>
+      </p:sp>
+      <p:pic>
+        <p:nvPicPr>
+          <p:cNvPr id="7" name="Picture 6">
+            <a:extLst>
+              <a:ext uri="{FF2B5EF4-FFF2-40B4-BE49-F238E27FC236}">
+                <a16:creationId xmlns:a16="http://schemas.microsoft.com/office/drawing/2014/main" id="{499DCFE3-8BCD-6DAE-192C-21F9681469C1}"/>
+              </a:ext>
+            </a:extLst>
+          </p:cNvPr>
+          <p:cNvPicPr>
+            <a:picLocks noChangeAspect="1"/>
+          </p:cNvPicPr>
+          <p:nvPr/>
+        </p:nvPicPr>
+        <p:blipFill>
+          <a:blip r:embed="rId2"/>
+          <a:stretch>
+            <a:fillRect/>
+          </a:stretch>
+        </p:blipFill>
+        <p:spPr>
+          <a:xfrm>
+            <a:off x="584751" y="763316"/>
+            <a:ext cx="6388543" cy="3262599"/>
+          </a:xfrm>
+          <a:prstGeom prst="rect">
+            <a:avLst/>
+          </a:prstGeom>
+        </p:spPr>
+      </p:pic>
+      <p:graphicFrame>
+        <p:nvGraphicFramePr>
+          <p:cNvPr id="8" name="Table 7">
+            <a:extLst>
+              <a:ext uri="{FF2B5EF4-FFF2-40B4-BE49-F238E27FC236}">
+                <a16:creationId xmlns:a16="http://schemas.microsoft.com/office/drawing/2014/main" id="{A3595432-E1A5-B810-9510-81A254898E07}"/>
+              </a:ext>
+            </a:extLst>
+          </p:cNvPr>
+          <p:cNvGraphicFramePr>
+            <a:graphicFrameLocks noGrp="1"/>
+          </p:cNvGraphicFramePr>
+          <p:nvPr>
+            <p:extLst>
+              <p:ext uri="{D42A27DB-BD31-4B8C-83A1-F6EECF244321}">
+                <p14:modId xmlns:p14="http://schemas.microsoft.com/office/powerpoint/2010/main" val="514448576"/>
+              </p:ext>
+            </p:extLst>
+          </p:nvPr>
+        </p:nvGraphicFramePr>
+        <p:xfrm>
+          <a:off x="584751" y="4296975"/>
+          <a:ext cx="8127999" cy="1483360"/>
+        </p:xfrm>
+        <a:graphic>
+          <a:graphicData uri="http://schemas.openxmlformats.org/drawingml/2006/table">
+            <a:tbl>
+              <a:tblPr firstRow="1" bandRow="1">
+                <a:tableStyleId>{5C22544A-7EE6-4342-B048-85BDC9FD1C3A}</a:tableStyleId>
+              </a:tblPr>
+              <a:tblGrid>
+                <a:gridCol w="2709333">
+                  <a:extLst>
+                    <a:ext uri="{9D8B030D-6E8A-4147-A177-3AD203B41FA5}">
+                      <a16:colId xmlns:a16="http://schemas.microsoft.com/office/drawing/2014/main" val="2977968279"/>
+                    </a:ext>
+                  </a:extLst>
+                </a:gridCol>
+                <a:gridCol w="2709333">
+                  <a:extLst>
+                    <a:ext uri="{9D8B030D-6E8A-4147-A177-3AD203B41FA5}">
+                      <a16:colId xmlns:a16="http://schemas.microsoft.com/office/drawing/2014/main" val="4070574709"/>
+                    </a:ext>
+                  </a:extLst>
+                </a:gridCol>
+                <a:gridCol w="2709333">
+                  <a:extLst>
+                    <a:ext uri="{9D8B030D-6E8A-4147-A177-3AD203B41FA5}">
+                      <a16:colId xmlns:a16="http://schemas.microsoft.com/office/drawing/2014/main" val="4244663991"/>
+                    </a:ext>
+                  </a:extLst>
+                </a:gridCol>
+              </a:tblGrid>
+              <a:tr h="370840">
+                <a:tc>
+                  <a:txBody>
+                    <a:bodyPr/>
+                    <a:lstStyle/>
+                    <a:p>
+                      <a:r>
+                        <a:rPr lang="en-US" dirty="0"/>
+                        <a:t>Z</a:t>
+                      </a:r>
+                    </a:p>
+                  </a:txBody>
+                  <a:tcPr/>
+                </a:tc>
+                <a:tc>
+                  <a:txBody>
+                    <a:bodyPr/>
+                    <a:lstStyle/>
+                    <a:p>
+                      <a:r>
+                        <a:rPr lang="en-US" dirty="0"/>
+                        <a:t>W(mil)</a:t>
+                      </a:r>
+                    </a:p>
+                  </a:txBody>
+                  <a:tcPr/>
+                </a:tc>
+                <a:tc>
+                  <a:txBody>
+                    <a:bodyPr/>
+                    <a:lstStyle/>
+                    <a:p>
+                      <a:r>
+                        <a:rPr lang="en-US" dirty="0"/>
+                        <a:t>L(90 degree)</a:t>
+                      </a:r>
+                    </a:p>
+                  </a:txBody>
+                  <a:tcPr/>
+                </a:tc>
+                <a:extLst>
+                  <a:ext uri="{0D108BD9-81ED-4DB2-BD59-A6C34878D82A}">
+                    <a16:rowId xmlns:a16="http://schemas.microsoft.com/office/drawing/2014/main" val="83472412"/>
+                  </a:ext>
+                </a:extLst>
+              </a:tr>
+              <a:tr h="370840">
+                <a:tc>
+                  <a:txBody>
+                    <a:bodyPr/>
+                    <a:lstStyle/>
+                    <a:p>
+                      <a:r>
+                        <a:rPr lang="en-US" dirty="0"/>
+                        <a:t>59.5</a:t>
+                      </a:r>
+                    </a:p>
+                  </a:txBody>
+                  <a:tcPr/>
+                </a:tc>
+                <a:tc>
+                  <a:txBody>
+                    <a:bodyPr/>
+                    <a:lstStyle/>
+                    <a:p>
+                      <a:r>
+                        <a:rPr lang="en-US" dirty="0"/>
+                        <a:t>30.83</a:t>
+                      </a:r>
+                    </a:p>
+                  </a:txBody>
+                  <a:tcPr/>
+                </a:tc>
+                <a:tc>
+                  <a:txBody>
+                    <a:bodyPr/>
+                    <a:lstStyle/>
+                    <a:p>
+                      <a:r>
+                        <a:rPr lang="en-US" dirty="0"/>
+                        <a:t>208.25</a:t>
+                      </a:r>
+                    </a:p>
+                  </a:txBody>
+                  <a:tcPr/>
+                </a:tc>
+                <a:extLst>
+                  <a:ext uri="{0D108BD9-81ED-4DB2-BD59-A6C34878D82A}">
+                    <a16:rowId xmlns:a16="http://schemas.microsoft.com/office/drawing/2014/main" val="1836169086"/>
+                  </a:ext>
+                </a:extLst>
+              </a:tr>
+              <a:tr h="370840">
+                <a:tc>
+                  <a:txBody>
+                    <a:bodyPr/>
+                    <a:lstStyle/>
+                    <a:p>
+                      <a:r>
+                        <a:rPr lang="en-US" dirty="0"/>
+                        <a:t>84.03</a:t>
+                      </a:r>
+                    </a:p>
+                  </a:txBody>
+                  <a:tcPr/>
+                </a:tc>
+                <a:tc>
+                  <a:txBody>
+                    <a:bodyPr/>
+                    <a:lstStyle/>
+                    <a:p>
+                      <a:r>
+                        <a:rPr lang="en-US" dirty="0"/>
+                        <a:t>14.39</a:t>
+                      </a:r>
+                    </a:p>
+                  </a:txBody>
+                  <a:tcPr/>
+                </a:tc>
+                <a:tc>
+                  <a:txBody>
+                    <a:bodyPr/>
+                    <a:lstStyle/>
+                    <a:p>
+                      <a:r>
+                        <a:rPr lang="en-US" dirty="0"/>
+                        <a:t>213.23</a:t>
+                      </a:r>
+                    </a:p>
+                  </a:txBody>
+                  <a:tcPr/>
+                </a:tc>
+                <a:extLst>
+                  <a:ext uri="{0D108BD9-81ED-4DB2-BD59-A6C34878D82A}">
+                    <a16:rowId xmlns:a16="http://schemas.microsoft.com/office/drawing/2014/main" val="4203022158"/>
+                  </a:ext>
+                </a:extLst>
+              </a:tr>
+              <a:tr h="370840">
+                <a:tc>
+                  <a:txBody>
+                    <a:bodyPr/>
+                    <a:lstStyle/>
+                    <a:p>
+                      <a:r>
+                        <a:rPr lang="en-US" dirty="0"/>
+                        <a:t>50</a:t>
+                      </a:r>
+                    </a:p>
+                  </a:txBody>
+                  <a:tcPr/>
+                </a:tc>
+                <a:tc>
+                  <a:txBody>
+                    <a:bodyPr/>
+                    <a:lstStyle/>
+                    <a:p>
+                      <a:r>
+                        <a:rPr lang="en-US" dirty="0"/>
+                        <a:t>42</a:t>
+                      </a:r>
+                    </a:p>
+                  </a:txBody>
+                  <a:tcPr/>
+                </a:tc>
+                <a:tc>
+                  <a:txBody>
+                    <a:bodyPr/>
+                    <a:lstStyle/>
+                    <a:p>
+                      <a:r>
+                        <a:rPr lang="en-US" dirty="0"/>
+                        <a:t>**</a:t>
+                      </a:r>
+                    </a:p>
+                  </a:txBody>
+                  <a:tcPr/>
+                </a:tc>
+                <a:extLst>
+                  <a:ext uri="{0D108BD9-81ED-4DB2-BD59-A6C34878D82A}">
+                    <a16:rowId xmlns:a16="http://schemas.microsoft.com/office/drawing/2014/main" val="679502428"/>
+                  </a:ext>
+                </a:extLst>
+              </a:tr>
+            </a:tbl>
+          </a:graphicData>
+        </a:graphic>
+      </p:graphicFrame>
+    </p:spTree>
+    <p:extLst>
+      <p:ext uri="{BB962C8B-B14F-4D97-AF65-F5344CB8AC3E}">
+        <p14:creationId xmlns:p14="http://schemas.microsoft.com/office/powerpoint/2010/main" val="2451231375"/>
+      </p:ext>
+    </p:extLst>
+  </p:cSld>
+  <p:clrMapOvr>
+    <a:masterClrMapping/>
+  </p:clrMapOvr>
+</p:sld>
+</file>
+
+<file path=ppt/slides/slide9.xml><?xml version="1.0" encoding="utf-8"?>
+<p:sld xmlns:a="http://schemas.openxmlformats.org/drawingml/2006/main" xmlns:r="http://schemas.openxmlformats.org/officeDocument/2006/relationships" xmlns:p="http://schemas.openxmlformats.org/presentationml/2006/main">
+  <p:cSld>
+    <p:spTree>
+      <p:nvGrpSpPr>
+        <p:cNvPr id="1" name=""/>
+        <p:cNvGrpSpPr/>
+        <p:nvPr/>
+      </p:nvGrpSpPr>
+      <p:grpSpPr>
+        <a:xfrm>
+          <a:off x="0" y="0"/>
+          <a:ext cx="0" cy="0"/>
+          <a:chOff x="0" y="0"/>
+          <a:chExt cx="0" cy="0"/>
+        </a:xfrm>
+      </p:grpSpPr>
+      <p:sp>
+        <p:nvSpPr>
+          <p:cNvPr id="5" name="TextBox 4">
+            <a:extLst>
+              <a:ext uri="{FF2B5EF4-FFF2-40B4-BE49-F238E27FC236}">
+                <a16:creationId xmlns:a16="http://schemas.microsoft.com/office/drawing/2014/main" id="{EB20A29B-F823-4B3D-2843-1FD7814D6E13}"/>
+              </a:ext>
+            </a:extLst>
+          </p:cNvPr>
+          <p:cNvSpPr txBox="1"/>
+          <p:nvPr/>
+        </p:nvSpPr>
+        <p:spPr>
+          <a:xfrm>
+            <a:off x="81363" y="122924"/>
+            <a:ext cx="2661838" cy="369332"/>
+          </a:xfrm>
+          <a:prstGeom prst="rect">
+            <a:avLst/>
+          </a:prstGeom>
+          <a:noFill/>
+        </p:spPr>
+        <p:txBody>
+          <a:bodyPr wrap="square">
+            <a:spAutoFit/>
+          </a:bodyPr>
+          <a:lstStyle/>
+          <a:p>
+            <a:pPr algn="ctr"/>
+            <a:r>
+              <a:rPr lang="en-US" sz="1800" dirty="0"/>
+              <a:t>WPD6:10-12 GHz</a:t>
+            </a:r>
+          </a:p>
+        </p:txBody>
+      </p:sp>
+      <p:pic>
+        <p:nvPicPr>
+          <p:cNvPr id="7" name="Picture 6">
+            <a:extLst>
+              <a:ext uri="{FF2B5EF4-FFF2-40B4-BE49-F238E27FC236}">
+                <a16:creationId xmlns:a16="http://schemas.microsoft.com/office/drawing/2014/main" id="{56AAD73F-6591-6F15-64F3-23C8995D6F03}"/>
+              </a:ext>
+            </a:extLst>
+          </p:cNvPr>
+          <p:cNvPicPr>
+            <a:picLocks noChangeAspect="1"/>
+          </p:cNvPicPr>
+          <p:nvPr/>
+        </p:nvPicPr>
+        <p:blipFill>
+          <a:blip r:embed="rId2"/>
+          <a:stretch>
+            <a:fillRect/>
+          </a:stretch>
+        </p:blipFill>
+        <p:spPr>
+          <a:xfrm>
+            <a:off x="562206" y="492256"/>
+            <a:ext cx="8589745" cy="4433417"/>
+          </a:xfrm>
+          <a:prstGeom prst="rect">
+            <a:avLst/>
+          </a:prstGeom>
+        </p:spPr>
+      </p:pic>
+      <p:graphicFrame>
+        <p:nvGraphicFramePr>
+          <p:cNvPr id="9" name="Table 8">
+            <a:extLst>
+              <a:ext uri="{FF2B5EF4-FFF2-40B4-BE49-F238E27FC236}">
+                <a16:creationId xmlns:a16="http://schemas.microsoft.com/office/drawing/2014/main" id="{B345A437-7BFE-010F-1850-57D22AFB477E}"/>
+              </a:ext>
+            </a:extLst>
+          </p:cNvPr>
+          <p:cNvGraphicFramePr>
+            <a:graphicFrameLocks noGrp="1"/>
+          </p:cNvGraphicFramePr>
+          <p:nvPr>
+            <p:extLst>
+              <p:ext uri="{D42A27DB-BD31-4B8C-83A1-F6EECF244321}">
+                <p14:modId xmlns:p14="http://schemas.microsoft.com/office/powerpoint/2010/main" val="2633880675"/>
+              </p:ext>
+            </p:extLst>
+          </p:nvPr>
+        </p:nvGraphicFramePr>
+        <p:xfrm>
+          <a:off x="688118" y="5020544"/>
+          <a:ext cx="8127999" cy="1483360"/>
+        </p:xfrm>
+        <a:graphic>
+          <a:graphicData uri="http://schemas.openxmlformats.org/drawingml/2006/table">
+            <a:tbl>
+              <a:tblPr firstRow="1" bandRow="1">
+                <a:tableStyleId>{5C22544A-7EE6-4342-B048-85BDC9FD1C3A}</a:tableStyleId>
+              </a:tblPr>
+              <a:tblGrid>
+                <a:gridCol w="2709333">
+                  <a:extLst>
+                    <a:ext uri="{9D8B030D-6E8A-4147-A177-3AD203B41FA5}">
+                      <a16:colId xmlns:a16="http://schemas.microsoft.com/office/drawing/2014/main" val="2977968279"/>
+                    </a:ext>
+                  </a:extLst>
+                </a:gridCol>
+                <a:gridCol w="2709333">
+                  <a:extLst>
+                    <a:ext uri="{9D8B030D-6E8A-4147-A177-3AD203B41FA5}">
+                      <a16:colId xmlns:a16="http://schemas.microsoft.com/office/drawing/2014/main" val="4070574709"/>
+                    </a:ext>
+                  </a:extLst>
+                </a:gridCol>
+                <a:gridCol w="2709333">
+                  <a:extLst>
+                    <a:ext uri="{9D8B030D-6E8A-4147-A177-3AD203B41FA5}">
+                      <a16:colId xmlns:a16="http://schemas.microsoft.com/office/drawing/2014/main" val="4244663991"/>
+                    </a:ext>
+                  </a:extLst>
+                </a:gridCol>
+              </a:tblGrid>
+              <a:tr h="370840">
+                <a:tc>
+                  <a:txBody>
+                    <a:bodyPr/>
+                    <a:lstStyle/>
+                    <a:p>
+                      <a:r>
+                        <a:rPr lang="en-US" dirty="0"/>
+                        <a:t>Z</a:t>
+                      </a:r>
+                    </a:p>
+                  </a:txBody>
+                  <a:tcPr/>
+                </a:tc>
+                <a:tc>
+                  <a:txBody>
+                    <a:bodyPr/>
+                    <a:lstStyle/>
+                    <a:p>
+                      <a:r>
+                        <a:rPr lang="en-US" dirty="0"/>
+                        <a:t>W(mil)</a:t>
+                      </a:r>
+                    </a:p>
+                  </a:txBody>
+                  <a:tcPr/>
+                </a:tc>
+                <a:tc>
+                  <a:txBody>
+                    <a:bodyPr/>
+                    <a:lstStyle/>
+                    <a:p>
+                      <a:r>
+                        <a:rPr lang="en-US" dirty="0"/>
+                        <a:t>L(90 degree)</a:t>
+                      </a:r>
+                    </a:p>
+                  </a:txBody>
+                  <a:tcPr/>
+                </a:tc>
+                <a:extLst>
+                  <a:ext uri="{0D108BD9-81ED-4DB2-BD59-A6C34878D82A}">
+                    <a16:rowId xmlns:a16="http://schemas.microsoft.com/office/drawing/2014/main" val="83472412"/>
+                  </a:ext>
+                </a:extLst>
+              </a:tr>
+              <a:tr h="370840">
+                <a:tc>
+                  <a:txBody>
+                    <a:bodyPr/>
+                    <a:lstStyle/>
+                    <a:p>
+                      <a:r>
+                        <a:rPr lang="en-US" dirty="0"/>
+                        <a:t>59.5</a:t>
+                      </a:r>
+                    </a:p>
+                  </a:txBody>
+                  <a:tcPr/>
+                </a:tc>
+                <a:tc>
+                  <a:txBody>
+                    <a:bodyPr/>
+                    <a:lstStyle/>
+                    <a:p>
+                      <a:r>
+                        <a:rPr lang="en-US" dirty="0"/>
+                        <a:t>30.83</a:t>
+                      </a:r>
+                    </a:p>
+                  </a:txBody>
+                  <a:tcPr/>
+                </a:tc>
+                <a:tc>
+                  <a:txBody>
+                    <a:bodyPr/>
+                    <a:lstStyle/>
+                    <a:p>
+                      <a:r>
+                        <a:rPr lang="en-US" dirty="0"/>
+                        <a:t>208.25</a:t>
+                      </a:r>
+                    </a:p>
+                  </a:txBody>
+                  <a:tcPr/>
+                </a:tc>
+                <a:extLst>
+                  <a:ext uri="{0D108BD9-81ED-4DB2-BD59-A6C34878D82A}">
+                    <a16:rowId xmlns:a16="http://schemas.microsoft.com/office/drawing/2014/main" val="1836169086"/>
+                  </a:ext>
+                </a:extLst>
+              </a:tr>
+              <a:tr h="370840">
+                <a:tc>
+                  <a:txBody>
+                    <a:bodyPr/>
+                    <a:lstStyle/>
+                    <a:p>
+                      <a:r>
+                        <a:rPr lang="en-US" dirty="0"/>
+                        <a:t>84.03</a:t>
+                      </a:r>
+                    </a:p>
+                  </a:txBody>
+                  <a:tcPr/>
+                </a:tc>
+                <a:tc>
+                  <a:txBody>
+                    <a:bodyPr/>
+                    <a:lstStyle/>
+                    <a:p>
+                      <a:r>
+                        <a:rPr lang="en-US" dirty="0"/>
+                        <a:t>14.39</a:t>
+                      </a:r>
+                    </a:p>
+                  </a:txBody>
+                  <a:tcPr/>
+                </a:tc>
+                <a:tc>
+                  <a:txBody>
+                    <a:bodyPr/>
+                    <a:lstStyle/>
+                    <a:p>
+                      <a:r>
+                        <a:rPr lang="en-US" dirty="0"/>
+                        <a:t>213.23</a:t>
+                      </a:r>
+                    </a:p>
+                  </a:txBody>
+                  <a:tcPr/>
+                </a:tc>
+                <a:extLst>
+                  <a:ext uri="{0D108BD9-81ED-4DB2-BD59-A6C34878D82A}">
+                    <a16:rowId xmlns:a16="http://schemas.microsoft.com/office/drawing/2014/main" val="4203022158"/>
+                  </a:ext>
+                </a:extLst>
+              </a:tr>
+              <a:tr h="370840">
+                <a:tc>
+                  <a:txBody>
+                    <a:bodyPr/>
+                    <a:lstStyle/>
+                    <a:p>
+                      <a:r>
+                        <a:rPr lang="en-US" dirty="0"/>
+                        <a:t>50</a:t>
+                      </a:r>
+                    </a:p>
+                  </a:txBody>
+                  <a:tcPr/>
+                </a:tc>
+                <a:tc>
+                  <a:txBody>
+                    <a:bodyPr/>
+                    <a:lstStyle/>
+                    <a:p>
+                      <a:r>
+                        <a:rPr lang="en-US" dirty="0"/>
+                        <a:t>42</a:t>
+                      </a:r>
+                    </a:p>
+                  </a:txBody>
+                  <a:tcPr/>
+                </a:tc>
+                <a:tc>
+                  <a:txBody>
+                    <a:bodyPr/>
+                    <a:lstStyle/>
+                    <a:p>
+                      <a:r>
+                        <a:rPr lang="en-US" dirty="0"/>
+                        <a:t>**</a:t>
+                      </a:r>
+                    </a:p>
+                  </a:txBody>
+                  <a:tcPr/>
+                </a:tc>
+                <a:extLst>
+                  <a:ext uri="{0D108BD9-81ED-4DB2-BD59-A6C34878D82A}">
+                    <a16:rowId xmlns:a16="http://schemas.microsoft.com/office/drawing/2014/main" val="679502428"/>
+                  </a:ext>
+                </a:extLst>
+              </a:tr>
+            </a:tbl>
+          </a:graphicData>
+        </a:graphic>
+      </p:graphicFrame>
+    </p:spTree>
+    <p:extLst>
+      <p:ext uri="{BB962C8B-B14F-4D97-AF65-F5344CB8AC3E}">
+        <p14:creationId xmlns:p14="http://schemas.microsoft.com/office/powerpoint/2010/main" val="1316632257"/>
       </p:ext>
     </p:extLst>
   </p:cSld>

--- a/CST simulation/Wilkinson Power Divider Simulation.pptx
+++ b/CST simulation/Wilkinson Power Divider Simulation.pptx
@@ -273,7 +273,7 @@
           <a:p>
             <a:fld id="{DBB1ACE0-7167-418E-A7EF-EFF9F52AAEFB}" type="datetimeFigureOut">
               <a:rPr lang="en-US" smtClean="0"/>
-              <a:t>8/30/2026</a:t>
+              <a:t>9/5/2026</a:t>
             </a:fld>
             <a:endParaRPr lang="en-US"/>
           </a:p>
@@ -471,7 +471,7 @@
           <a:p>
             <a:fld id="{DBB1ACE0-7167-418E-A7EF-EFF9F52AAEFB}" type="datetimeFigureOut">
               <a:rPr lang="en-US" smtClean="0"/>
-              <a:t>8/30/2026</a:t>
+              <a:t>9/5/2026</a:t>
             </a:fld>
             <a:endParaRPr lang="en-US"/>
           </a:p>
@@ -679,7 +679,7 @@
           <a:p>
             <a:fld id="{DBB1ACE0-7167-418E-A7EF-EFF9F52AAEFB}" type="datetimeFigureOut">
               <a:rPr lang="en-US" smtClean="0"/>
-              <a:t>8/30/2026</a:t>
+              <a:t>9/5/2026</a:t>
             </a:fld>
             <a:endParaRPr lang="en-US"/>
           </a:p>
@@ -877,7 +877,7 @@
           <a:p>
             <a:fld id="{DBB1ACE0-7167-418E-A7EF-EFF9F52AAEFB}" type="datetimeFigureOut">
               <a:rPr lang="en-US" smtClean="0"/>
-              <a:t>8/30/2026</a:t>
+              <a:t>9/5/2026</a:t>
             </a:fld>
             <a:endParaRPr lang="en-US"/>
           </a:p>
@@ -1152,7 +1152,7 @@
           <a:p>
             <a:fld id="{DBB1ACE0-7167-418E-A7EF-EFF9F52AAEFB}" type="datetimeFigureOut">
               <a:rPr lang="en-US" smtClean="0"/>
-              <a:t>8/30/2026</a:t>
+              <a:t>9/5/2026</a:t>
             </a:fld>
             <a:endParaRPr lang="en-US"/>
           </a:p>
@@ -1417,7 +1417,7 @@
           <a:p>
             <a:fld id="{DBB1ACE0-7167-418E-A7EF-EFF9F52AAEFB}" type="datetimeFigureOut">
               <a:rPr lang="en-US" smtClean="0"/>
-              <a:t>8/30/2026</a:t>
+              <a:t>9/5/2026</a:t>
             </a:fld>
             <a:endParaRPr lang="en-US"/>
           </a:p>
@@ -1829,7 +1829,7 @@
           <a:p>
             <a:fld id="{DBB1ACE0-7167-418E-A7EF-EFF9F52AAEFB}" type="datetimeFigureOut">
               <a:rPr lang="en-US" smtClean="0"/>
-              <a:t>8/30/2026</a:t>
+              <a:t>9/5/2026</a:t>
             </a:fld>
             <a:endParaRPr lang="en-US"/>
           </a:p>
@@ -1970,7 +1970,7 @@
           <a:p>
             <a:fld id="{DBB1ACE0-7167-418E-A7EF-EFF9F52AAEFB}" type="datetimeFigureOut">
               <a:rPr lang="en-US" smtClean="0"/>
-              <a:t>8/30/2026</a:t>
+              <a:t>9/5/2026</a:t>
             </a:fld>
             <a:endParaRPr lang="en-US"/>
           </a:p>
@@ -2083,7 +2083,7 @@
           <a:p>
             <a:fld id="{DBB1ACE0-7167-418E-A7EF-EFF9F52AAEFB}" type="datetimeFigureOut">
               <a:rPr lang="en-US" smtClean="0"/>
-              <a:t>8/30/2026</a:t>
+              <a:t>9/5/2026</a:t>
             </a:fld>
             <a:endParaRPr lang="en-US"/>
           </a:p>
@@ -2394,7 +2394,7 @@
           <a:p>
             <a:fld id="{DBB1ACE0-7167-418E-A7EF-EFF9F52AAEFB}" type="datetimeFigureOut">
               <a:rPr lang="en-US" smtClean="0"/>
-              <a:t>8/30/2026</a:t>
+              <a:t>9/5/2026</a:t>
             </a:fld>
             <a:endParaRPr lang="en-US"/>
           </a:p>
@@ -2682,7 +2682,7 @@
           <a:p>
             <a:fld id="{DBB1ACE0-7167-418E-A7EF-EFF9F52AAEFB}" type="datetimeFigureOut">
               <a:rPr lang="en-US" smtClean="0"/>
-              <a:t>8/30/2026</a:t>
+              <a:t>9/5/2026</a:t>
             </a:fld>
             <a:endParaRPr lang="en-US"/>
           </a:p>
@@ -2923,7 +2923,7 @@
           <a:p>
             <a:fld id="{DBB1ACE0-7167-418E-A7EF-EFF9F52AAEFB}" type="datetimeFigureOut">
               <a:rPr lang="en-US" smtClean="0"/>
-              <a:t>8/30/2026</a:t>
+              <a:t>9/5/2026</a:t>
             </a:fld>
             <a:endParaRPr lang="en-US"/>
           </a:p>
@@ -4581,7 +4581,7 @@
         </p:nvGrpSpPr>
         <p:grpSpPr>
           <a:xfrm>
-            <a:off x="1026696" y="1024921"/>
+            <a:off x="1026696" y="1573561"/>
             <a:ext cx="5411702" cy="4808158"/>
             <a:chOff x="794084" y="881955"/>
             <a:chExt cx="5411702" cy="4808158"/>
@@ -5141,7 +5141,7 @@
                   <a:ea typeface="等线" panose="02010600030101010101" pitchFamily="2" charset="-122"/>
                   <a:cs typeface="Times New Roman" panose="02020603050405020304" pitchFamily="18" charset="0"/>
                 </a:rPr>
-                <a:t>2.40 </a:t>
+                <a:t>1.90 </a:t>
               </a:r>
               <a:endParaRPr lang="en-US" dirty="0"/>
             </a:p>
@@ -5182,7 +5182,7 @@
                   <a:ea typeface="等线" panose="02010600030101010101" pitchFamily="2" charset="-122"/>
                   <a:cs typeface="Times New Roman" panose="02020603050405020304" pitchFamily="18" charset="0"/>
                 </a:rPr>
-                <a:t>3.76 </a:t>
+                <a:t>3.7</a:t>
               </a:r>
               <a:endParaRPr lang="en-US" dirty="0"/>
             </a:p>
@@ -5355,7 +5355,7 @@
                   <a:ea typeface="等线" panose="02010600030101010101" pitchFamily="2" charset="-122"/>
                   <a:cs typeface="Times New Roman" panose="02020603050405020304" pitchFamily="18" charset="0"/>
                 </a:rPr>
-                <a:t>5.11 </a:t>
+                <a:t>4.7 </a:t>
               </a:r>
               <a:endParaRPr lang="en-US" dirty="0"/>
             </a:p>
@@ -5396,7 +5396,7 @@
                   <a:ea typeface="等线" panose="02010600030101010101" pitchFamily="2" charset="-122"/>
                   <a:cs typeface="Times New Roman" panose="02020603050405020304" pitchFamily="18" charset="0"/>
                 </a:rPr>
-                <a:t>6.47 </a:t>
+                <a:t>6.5 </a:t>
               </a:r>
               <a:endParaRPr lang="en-US" dirty="0"/>
             </a:p>
@@ -5437,7 +5437,7 @@
                   <a:ea typeface="等线" panose="02010600030101010101" pitchFamily="2" charset="-122"/>
                   <a:cs typeface="Times New Roman" panose="02020603050405020304" pitchFamily="18" charset="0"/>
                 </a:rPr>
-                <a:t>7.83</a:t>
+                <a:t>7.5</a:t>
               </a:r>
               <a:endParaRPr lang="en-US" dirty="0"/>
             </a:p>
@@ -5478,7 +5478,7 @@
                   <a:ea typeface="等线" panose="02010600030101010101" pitchFamily="2" charset="-122"/>
                   <a:cs typeface="Times New Roman" panose="02020603050405020304" pitchFamily="18" charset="0"/>
                 </a:rPr>
-                <a:t>9.19</a:t>
+                <a:t>9.36</a:t>
               </a:r>
               <a:endParaRPr lang="en-US" dirty="0"/>
             </a:p>
@@ -5519,7 +5519,7 @@
                   <a:ea typeface="等线" panose="02010600030101010101" pitchFamily="2" charset="-122"/>
                   <a:cs typeface="Times New Roman" panose="02020603050405020304" pitchFamily="18" charset="0"/>
                 </a:rPr>
-                <a:t>10.54</a:t>
+                <a:t>10.48</a:t>
               </a:r>
               <a:endParaRPr lang="en-US" dirty="0"/>
             </a:p>
@@ -5560,13 +5560,137 @@
                   <a:ea typeface="等线" panose="02010600030101010101" pitchFamily="2" charset="-122"/>
                   <a:cs typeface="Times New Roman" panose="02020603050405020304" pitchFamily="18" charset="0"/>
                 </a:rPr>
-                <a:t>11.90</a:t>
+                <a:t>12.40</a:t>
               </a:r>
               <a:endParaRPr lang="en-US" dirty="0"/>
             </a:p>
           </p:txBody>
         </p:sp>
       </p:grpSp>
+      <p:pic>
+        <p:nvPicPr>
+          <p:cNvPr id="3" name="Picture 2">
+            <a:extLst>
+              <a:ext uri="{FF2B5EF4-FFF2-40B4-BE49-F238E27FC236}">
+                <a16:creationId xmlns:a16="http://schemas.microsoft.com/office/drawing/2014/main" id="{CA4A7A78-398B-87BB-052B-398C6208C402}"/>
+              </a:ext>
+            </a:extLst>
+          </p:cNvPr>
+          <p:cNvPicPr>
+            <a:picLocks noChangeAspect="1"/>
+          </p:cNvPicPr>
+          <p:nvPr/>
+        </p:nvPicPr>
+        <p:blipFill>
+          <a:blip r:embed="rId2"/>
+          <a:stretch>
+            <a:fillRect/>
+          </a:stretch>
+        </p:blipFill>
+        <p:spPr>
+          <a:xfrm>
+            <a:off x="580115" y="-221419"/>
+            <a:ext cx="8869013" cy="1400370"/>
+          </a:xfrm>
+          <a:prstGeom prst="rect">
+            <a:avLst/>
+          </a:prstGeom>
+        </p:spPr>
+      </p:pic>
+      <p:sp>
+        <p:nvSpPr>
+          <p:cNvPr id="15" name="TextBox 14">
+            <a:extLst>
+              <a:ext uri="{FF2B5EF4-FFF2-40B4-BE49-F238E27FC236}">
+                <a16:creationId xmlns:a16="http://schemas.microsoft.com/office/drawing/2014/main" id="{C12CFE3A-F117-6C0C-901C-2C2AF8B8581C}"/>
+              </a:ext>
+            </a:extLst>
+          </p:cNvPr>
+          <p:cNvSpPr txBox="1"/>
+          <p:nvPr/>
+        </p:nvSpPr>
+        <p:spPr>
+          <a:xfrm>
+            <a:off x="7031654" y="2018587"/>
+            <a:ext cx="3474721" cy="1754326"/>
+          </a:xfrm>
+          <a:prstGeom prst="rect">
+            <a:avLst/>
+          </a:prstGeom>
+          <a:noFill/>
+        </p:spPr>
+        <p:txBody>
+          <a:bodyPr wrap="square" rtlCol="0">
+            <a:spAutoFit/>
+          </a:bodyPr>
+          <a:lstStyle/>
+          <a:p>
+            <a:r>
+              <a:rPr lang="en-US" dirty="0"/>
+              <a:t>WPD1 : 1.9 – 6.5 GHz,4 rings</a:t>
+            </a:r>
+          </a:p>
+          <a:p>
+            <a:r>
+              <a:rPr lang="en-US" dirty="0"/>
+              <a:t>WPD3 : 1.9 – 3.7 GHz,2 rings WPD4: 4.7 – 6.5 GHz,2 rings</a:t>
+            </a:r>
+          </a:p>
+          <a:p>
+            <a:r>
+              <a:rPr lang="en-US" dirty="0"/>
+              <a:t>WPD2 : 7.5 – 12.40GHz,4 rings</a:t>
+            </a:r>
+          </a:p>
+          <a:p>
+            <a:r>
+              <a:rPr lang="en-US" dirty="0"/>
+              <a:t>WPD5 : 7.5 – 9.36 GHz,2 rings</a:t>
+            </a:r>
+          </a:p>
+          <a:p>
+            <a:r>
+              <a:rPr lang="en-US" dirty="0"/>
+              <a:t>WPD6 : 10.36 – 12.40 GHz,2 rings</a:t>
+            </a:r>
+          </a:p>
+        </p:txBody>
+      </p:sp>
+      <p:sp>
+        <p:nvSpPr>
+          <p:cNvPr id="16" name="TextBox 15">
+            <a:extLst>
+              <a:ext uri="{FF2B5EF4-FFF2-40B4-BE49-F238E27FC236}">
+                <a16:creationId xmlns:a16="http://schemas.microsoft.com/office/drawing/2014/main" id="{BA3CE088-085C-F772-27BE-2EA80D175116}"/>
+              </a:ext>
+            </a:extLst>
+          </p:cNvPr>
+          <p:cNvSpPr txBox="1"/>
+          <p:nvPr/>
+        </p:nvSpPr>
+        <p:spPr>
+          <a:xfrm>
+            <a:off x="7076661" y="3901711"/>
+            <a:ext cx="2768308" cy="646331"/>
+          </a:xfrm>
+          <a:prstGeom prst="rect">
+            <a:avLst/>
+          </a:prstGeom>
+          <a:noFill/>
+        </p:spPr>
+        <p:txBody>
+          <a:bodyPr wrap="square" rtlCol="0">
+            <a:spAutoFit/>
+          </a:bodyPr>
+          <a:lstStyle/>
+          <a:p>
+            <a:r>
+              <a:rPr lang="en-US" dirty="0"/>
+              <a:t>Coco: WPD3,WPD4,WPD2</a:t>
+            </a:r>
+          </a:p>
+        </p:txBody>
+      </p:sp>
     </p:spTree>
     <p:extLst>
       <p:ext uri="{BB962C8B-B14F-4D97-AF65-F5344CB8AC3E}">
